--- a/docs/presentation.pptx
+++ b/docs/presentation.pptx
@@ -4210,7 +4210,7 @@
               </a:defRPr>
             </a:pPr>
             <a:r>
-              <a:t>• Impact Score event-study correlation: infrastructure built and unit-tested, but GDELT is unreachable from this dev sandbox, so a real n≥200 sample hasn't been produced yet here.</a:t>
+              <a:t>• Impact Score event-study correlation: pending -- needs a real GDELT sample (this dev sandbox cannot reach GDELT; see `docs/DATA_VERIFICATION.md` section 8). Run `scripts/run_impact_event_study.py` after `scripts/build_cache.py`.</a:t>
             </a:r>
           </a:p>
           <a:p>
@@ -4225,7 +4225,7 @@
               </a:defRPr>
             </a:pPr>
             <a:r>
-              <a:t>• Event classification accuracy: pending human labelling of the gold set; classifier frozen at rule-v1 specifically so that score will be honest, not tuned after the fact.</a:t>
+              <a:t>• Event classification accuracy: pending -- needs `data/eval/event_gold.csv` fully hand-labelled, then `scripts/score_event_classifier.py` (scores the frozen `rule-v1`, git tag `classifier-v1`).</a:t>
             </a:r>
           </a:p>
           <a:p>

--- a/docs/presentation.pptx
+++ b/docs/presentation.pptx
@@ -3895,7 +3895,7 @@
               </a:defRPr>
             </a:pPr>
             <a:r>
-              <a:t>FinBERT 0.660 macro-F1 [0.635, 0.684] vs VADER 0.453 vs majority-class 0.267 (n=2000, CIs don't overlap — real improvement). Bearish recall 76.5%. 138ms/doc on CPU.  |  76 real signals evaluated, 5 fired a stress test.  |  Naive duration-only error grows to -57,839 at -200bp vs. full reprice — genuine, growing convexity error, confirmed by tests.  ⚠ Market data (curve/equity spot) is PROVISIONAL this run — see docs/USER_TODO.md.</a:t>
+              <a:t>FinBERT 0.660 macro-F1 [0.635, 0.684] vs VADER 0.453 vs majority-class 0.267 (n=2000, CIs don't overlap — real improvement). Bearish recall 76.5%. 138ms/doc on CPU.  |  76 real signals evaluated, 3 fired a stress test.  |  Naive duration-only error grows to -57,839 at -200bp vs. full reprice — genuine, growing convexity error, confirmed by tests.  ⚠ Market data (curve/equity spot) is PROVISIONAL this run — see docs/USER_TODO.md.</a:t>
             </a:r>
           </a:p>
         </p:txBody>

--- a/docs/presentation.pptx
+++ b/docs/presentation.pptx
@@ -3895,7 +3895,7 @@
               </a:defRPr>
             </a:pPr>
             <a:r>
-              <a:t>FinBERT 0.660 macro-F1 [0.635, 0.684] vs VADER 0.453 vs majority-class 0.267 (n=2000, CIs don't overlap — real improvement). Bearish recall 76.5%. 138ms/doc on CPU.  |  76 real signals evaluated, 3 fired a stress test.  |  Naive duration-only error grows to -57,839 at -200bp vs. full reprice — genuine, growing convexity error, confirmed by tests.  ⚠ Market data (curve/equity spot) is PROVISIONAL this run — see docs/USER_TODO.md.</a:t>
+              <a:t>FinBERT 0.660 macro-F1 [0.635, 0.684] vs VADER 0.453 vs majority-class 0.267 (n=2000, CIs don't overlap — real improvement). Bearish recall 76.5%. 138ms/doc on CPU.  |  76 real signals evaluated, 3 fired a stress test.  |  Naive duration-only error grows to -62,358 at -200bp vs. full reprice — genuine, growing convexity error, confirmed by tests.</a:t>
             </a:r>
           </a:p>
         </p:txBody>
@@ -4210,7 +4210,7 @@
               </a:defRPr>
             </a:pPr>
             <a:r>
-              <a:t>• Impact Score event-study correlation: pending -- needs a real GDELT sample (this dev sandbox cannot reach GDELT; see `docs/DATA_VERIFICATION.md` section 8). Run `scripts/run_impact_event_study.py` after `scripts/build_cache.py`.</a:t>
+              <a:t>• Impact Score event-study correlation: not run -- GDELT rate-limited: HTTP 429 returned on every query for 2+ hours (0 articles returned). Abandoned as a data source for this submission. (attempted 2026-10-18). No number is reported here because none was computed -- see `docs/ASSUMPTIONS.md` "Impact-score event study: not run".</a:t>
             </a:r>
           </a:p>
           <a:p>
@@ -4240,7 +4240,7 @@
               </a:defRPr>
             </a:pPr>
             <a:r>
-              <a:t>• Market data (Treasury curve, equity spot) is PROVISIONAL in this build — fetched via a tool with a summarising model in the loop, not a direct download; a verification script exists to cross-check it.</a:t>
+              <a:t>• Market data (Treasury curve, equity spot) is SOURCED, not provisional — fetched directly. An earlier WebFetch-relayed snapshot was off by 38-141bp at every tenor (transcription error) and was replaced.</a:t>
             </a:r>
           </a:p>
           <a:p>
@@ -4285,7 +4285,7 @@
               </a:defRPr>
             </a:pPr>
             <a:r>
-              <a:t>• Next: finish the two pending evaluations once real GDELT/market data is available; Module A (tactical rebalancing) if time permits.</a:t>
+              <a:t>• Next: finish event-classification scoring once the gold set is hand-labelled. The impact-score event study has no further next step with GDELT abandoned (rate-limited, 0 articles over 2+ hours) — it would need a different news source entirely.</a:t>
             </a:r>
           </a:p>
         </p:txBody>

--- a/docs/presentation.pptx
+++ b/docs/presentation.pptx
@@ -3895,7 +3895,7 @@
               </a:defRPr>
             </a:pPr>
             <a:r>
-              <a:t>FinBERT 0.660 macro-F1 [0.635, 0.684] vs VADER 0.453 vs majority-class 0.267 (n=2000, CIs don't overlap — real improvement). Bearish recall 76.5%. 138ms/doc on CPU.  |  76 real signals evaluated, 3 fired a stress test.  |  Naive duration-only error grows to -62,358 at -200bp vs. full reprice — genuine, growing convexity error, confirmed by tests.</a:t>
+              <a:t>FinBERT 0.660 macro-F1 [0.635, 0.684] vs VADER 0.453 vs majority-class 0.267 (n=2000, CIs don't overlap — real improvement). Bearish recall 76.5%. 138ms/doc on CPU.  |  76 real signals evaluated, 3 fired a stress test.  |  Naive duration-only error grows to -58,394 at -200bp vs. full reprice — genuine, growing convexity error, confirmed by tests.</a:t>
             </a:r>
           </a:p>
         </p:txBody>
@@ -4240,7 +4240,7 @@
               </a:defRPr>
             </a:pPr>
             <a:r>
-              <a:t>• Market data (Treasury curve, equity spot) is SOURCED, not provisional — fetched directly. An earlier WebFetch-relayed snapshot was off by 38-141bp at every tenor (transcription error) and was replaced.</a:t>
+              <a:t>• Market data (Treasury curve, equity spot) is SOURCED, not provisional — fetched directly. (An earlier as_of-selection bug briefly mis-dated the curve; the provisional snapshot itself was always accurate for its stated date — see docs/ASSUMPTIONS.md.)</a:t>
             </a:r>
           </a:p>
           <a:p>

--- a/docs/presentation.pptx
+++ b/docs/presentation.pptx
@@ -4225,7 +4225,7 @@
               </a:defRPr>
             </a:pPr>
             <a:r>
-              <a:t>• Event classification accuracy: pending -- needs `data/eval/event_gold.csv` fully hand-labelled, then `scripts/score_event_classifier.py` (scores the frozen `rule-v1`, git tag `classifier-v1`).</a:t>
+              <a:t>• Event classification (`rule-v1`, frozen before scoring, gold labels blind-human-only): accuracy=88.5%, 95% CI [83.3%, 92.2%], macro-F1=0.363 (macro-F1 over the 4 classes with support&gt;0 in this sample: ['Geopolitical', 'Macroeconomic', 'Credit Event', 'Other']) (n=200 hand-labelled examples). Majority-class baseline (always predicts 'Other'): accuracy=84.0% [78.3%, 88.4%], macro-F1=0.228.</a:t>
             </a:r>
           </a:p>
           <a:p>

--- a/docs/presentation.pptx
+++ b/docs/presentation.pptx
@@ -3290,7 +3290,42 @@
         </p:nvSpPr>
         <p:spPr>
           <a:xfrm>
-            <a:off x="457200" y="1188720"/>
+            <a:off x="457200" y="1143000"/>
+            <a:ext cx="11247120" cy="1005840"/>
+          </a:xfrm>
+          <a:prstGeom prst="rect">
+            <a:avLst/>
+          </a:prstGeom>
+          <a:noFill/>
+        </p:spPr>
+        <p:txBody>
+          <a:bodyPr wrap="square">
+            <a:spAutoFit/>
+          </a:bodyPr>
+          <a:lstStyle/>
+          <a:p>
+            <a:pPr>
+              <a:defRPr sz="2200" b="1">
+                <a:solidFill>
+                  <a:srgbClr val="0B0B0B"/>
+                </a:solidFill>
+              </a:defRPr>
+            </a:pPr>
+            <a:r>
+              <a:t>Risk and ratings teams can't manually read every headline fast enough to know what it means for a portfolio.</a:t>
+            </a:r>
+          </a:p>
+        </p:txBody>
+      </p:sp>
+      <p:sp>
+        <p:nvSpPr>
+          <p:cNvPr id="5" name="TextBox 4"/>
+          <p:cNvSpPr txBox="1"/>
+          <p:nvPr/>
+        </p:nvSpPr>
+        <p:spPr>
+          <a:xfrm>
+            <a:off x="457200" y="2286000"/>
             <a:ext cx="11247120" cy="5303520"/>
           </a:xfrm>
           <a:prstGeom prst="rect">
@@ -3315,7 +3350,7 @@
               </a:defRPr>
             </a:pPr>
             <a:r>
-              <a:t>• Risk and ratings teams can't manually read every headline fast enough to know what it means for a portfolio.</a:t>
+              <a:t>• Build: ingest news + social text → structured sentiment/event/impact signals → trigger a real portfolio stress test.</a:t>
             </a:r>
           </a:p>
           <a:p>
@@ -3330,7 +3365,7 @@
               </a:defRPr>
             </a:pPr>
             <a:r>
-              <a:t>• Build: ingest news + social text → structured sentiment/event/impact signals → trigger a real portfolio stress test.</a:t>
+              <a:t>• Three real assumptions that turned out false on inspection, adapted rather than worked around: X/Twitter has no free read API in 2026 (switched to Mastodon); FinBERT is fine-tuned on Financial PhraseBank, so we evaluated it on a disjoint dataset to avoid leakage; a naive "Target Corp" name match collided with "price target" in nearly every analyst note (fixed with cashtag + context rules).</a:t>
             </a:r>
           </a:p>
           <a:p>
@@ -3346,21 +3381,6 @@
             </a:pPr>
             <a:r>
               <a:t>• Discipline throughout: verify every external claim live, never report a number a script didn't actually produce.</a:t>
-            </a:r>
-          </a:p>
-          <a:p>
-            <a:pPr>
-              <a:spcAft>
-                <a:spcPts val="800"/>
-              </a:spcAft>
-              <a:defRPr sz="1800">
-                <a:solidFill>
-                  <a:srgbClr val="0B0B0B"/>
-                </a:solidFill>
-              </a:defRPr>
-            </a:pPr>
-            <a:r>
-              <a:t>• Confirmed false on inspection, adapted rather than worked around: X/Twitter has no free read API in 2026; FinBERT is fine-tuned on the exact dataset the brief's own eval plan implied using (leakage); "price target" collides with a naive "Target Corp" name match.</a:t>
             </a:r>
           </a:p>
         </p:txBody>
@@ -3478,8 +3498,8 @@
         </p:blipFill>
         <p:spPr>
           <a:xfrm>
-            <a:off x="365760" y="1051560"/>
-            <a:ext cx="11430000" cy="7082077"/>
+            <a:off x="1579629" y="1051560"/>
+            <a:ext cx="9002261" cy="5577840"/>
           </a:xfrm>
           <a:prstGeom prst="rect">
             <a:avLst/>
@@ -3795,7 +3815,7 @@
       </p:sp>
       <p:pic>
         <p:nvPicPr>
-          <p:cNvPr id="4" name="Picture 3" descr="sentiment_chart.png"/>
+          <p:cNvPr id="4" name="Picture 3" descr="live_signal_feed.png"/>
           <p:cNvPicPr>
             <a:picLocks noChangeAspect="1"/>
           </p:cNvPicPr>
@@ -3810,7 +3830,7 @@
         <p:spPr>
           <a:xfrm>
             <a:off x="274320" y="1051560"/>
-            <a:ext cx="3749039" cy="2249423"/>
+            <a:ext cx="3749039" cy="1641723"/>
           </a:xfrm>
           <a:prstGeom prst="rect">
             <a:avLst/>
@@ -3819,7 +3839,7 @@
       </p:pic>
       <p:pic>
         <p:nvPicPr>
-          <p:cNvPr id="5" name="Picture 4" descr="stress_test_chart.png"/>
+          <p:cNvPr id="5" name="Picture 4" descr="stress_test.png"/>
           <p:cNvPicPr>
             <a:picLocks noChangeAspect="1"/>
           </p:cNvPicPr>
@@ -3834,7 +3854,7 @@
         <p:spPr>
           <a:xfrm>
             <a:off x="4160520" y="1051560"/>
-            <a:ext cx="3749039" cy="2249423"/>
+            <a:ext cx="3749039" cy="1111217"/>
           </a:xfrm>
           <a:prstGeom prst="rect">
             <a:avLst/>
@@ -3843,7 +3863,7 @@
       </p:pic>
       <p:pic>
         <p:nvPicPr>
-          <p:cNvPr id="6" name="Picture 5" descr="naive_vs_full_chart.png"/>
+          <p:cNvPr id="6" name="Picture 5" descr="scenario_explorer.png"/>
           <p:cNvPicPr>
             <a:picLocks noChangeAspect="1"/>
           </p:cNvPicPr>
@@ -3858,7 +3878,7 @@
         <p:spPr>
           <a:xfrm>
             <a:off x="8046720" y="1051560"/>
-            <a:ext cx="3749039" cy="2249423"/>
+            <a:ext cx="3749039" cy="1396826"/>
           </a:xfrm>
           <a:prstGeom prst="rect">
             <a:avLst/>
@@ -3888,14 +3908,62 @@
           <a:lstStyle/>
           <a:p>
             <a:pPr>
-              <a:defRPr sz="1300">
+              <a:spcAft>
+                <a:spcPts val="300"/>
+              </a:spcAft>
+              <a:defRPr sz="1150">
                 <a:solidFill>
                   <a:srgbClr val="0B0B0B"/>
                 </a:solidFill>
               </a:defRPr>
             </a:pPr>
             <a:r>
-              <a:t>FinBERT 0.660 macro-F1 [0.635, 0.684] vs VADER 0.453 vs majority-class 0.267 (n=2000, CIs don't overlap — real improvement). Bearish recall 76.5%. 138ms/doc on CPU.  |  76 real signals evaluated, 3 fired a stress test.  |  Naive duration-only error grows to -58,394 at -200bp vs. full reprice — genuine, growing convexity error, confirmed by tests.</a:t>
+              <a:t>FinBERT 0.660 macro-F1 [0.635, 0.684] vs VADER 0.453 vs majority-class 0.267 (n=2000, CIs don't overlap — real improvement). Bearish recall 76.5%. 138ms/doc on CPU.</a:t>
+            </a:r>
+          </a:p>
+          <a:p>
+            <a:pPr>
+              <a:spcAft>
+                <a:spcPts val="300"/>
+              </a:spcAft>
+              <a:defRPr sz="1150">
+                <a:solidFill>
+                  <a:srgbClr val="0B0B0B"/>
+                </a:solidFill>
+              </a:defRPr>
+            </a:pPr>
+            <a:r>
+              <a:t>76 real signals evaluated, 3 fired a stress test. Naive duration-only error grows to 0.42% of position value at -200bp vs. full reprice — genuine, growing convexity error, confirmed by tests.</a:t>
+            </a:r>
+          </a:p>
+          <a:p>
+            <a:pPr>
+              <a:spcAft>
+                <a:spcPts val="300"/>
+              </a:spcAft>
+              <a:defRPr sz="1150">
+                <a:solidFill>
+                  <a:srgbClr val="0B0B0B"/>
+                </a:solidFill>
+              </a:defRPr>
+            </a:pPr>
+            <a:r>
+              <a:t>Event classifier (rule-v1): 88% overall accuracy, n=200 blind-labelled gold examples.</a:t>
+            </a:r>
+          </a:p>
+          <a:p>
+            <a:pPr>
+              <a:spcAft>
+                <a:spcPts val="300"/>
+              </a:spcAft>
+              <a:defRPr sz="1150">
+                <a:solidFill>
+                  <a:srgbClr val="0B0B0B"/>
+                </a:solidFill>
+              </a:defRPr>
+            </a:pPr>
+            <a:r>
+              <a:t>Headline stress result: portfolio value $658,497,132 -&gt; $644,703,575, total loss $-13,793,557 (-2.09%) — MTM P&amp;L $1,302,523, credit loss $15,096,079.</a:t>
             </a:r>
           </a:p>
         </p:txBody>
@@ -4075,7 +4143,7 @@
               </a:defRPr>
             </a:pPr>
             <a:r>
-              <a:t>• Fits S&amp;P Global / Crisil's own domain: credit events, rating-adjacent language, and portfolio-level stress are exactly the surface a ratings/risk-analytics business operates on.</a:t>
+              <a:t>• Fits S&amp;P Global / Crisil's own domain: the signal taxonomy spans credit events, rating-adjacent language, and portfolio-level stress — the same surface a ratings/risk-analytics business operates on. (Credit-event detection itself isn't validated yet — too little gold-labelled data so far, see Limitations.)</a:t>
             </a:r>
           </a:p>
         </p:txBody>
@@ -4203,14 +4271,14 @@
               <a:spcAft>
                 <a:spcPts val="800"/>
               </a:spcAft>
-              <a:defRPr sz="1500">
+              <a:defRPr sz="1300">
                 <a:solidFill>
                   <a:srgbClr val="0B0B0B"/>
                 </a:solidFill>
               </a:defRPr>
             </a:pPr>
             <a:r>
-              <a:t>• Impact Score event-study correlation: not run -- GDELT rate-limited: HTTP 429 returned on every query for 2+ hours (0 articles returned). Abandoned as a data source for this submission. (attempted 2026-10-18). No number is reported here because none was computed -- see `docs/ASSUMPTIONS.md` "Impact-score event study: not run".</a:t>
+              <a:t>• Impact-score event study: not run — GDELT rate-limited: HTTP 429 returned on every query for 2+ hours (0 articles returned). Abandoned as a data source for this submission.</a:t>
             </a:r>
           </a:p>
           <a:p>
@@ -4218,14 +4286,14 @@
               <a:spcAft>
                 <a:spcPts val="800"/>
               </a:spcAft>
-              <a:defRPr sz="1500">
+              <a:defRPr sz="1300">
                 <a:solidFill>
                   <a:srgbClr val="0B0B0B"/>
                 </a:solidFill>
               </a:defRPr>
             </a:pPr>
             <a:r>
-              <a:t>• Event classification (`rule-v1`, frozen before scoring, gold labels blind-human-only): accuracy=88.5%, 95% CI [83.3%, 92.2%], macro-F1=0.363 (macro-F1 over the 4 classes with support&gt;0 in this sample: ['Geopolitical', 'Macroeconomic', 'Credit Event', 'Other']) (n=200 hand-labelled examples). Majority-class baseline (always predicts 'Other'): accuracy=84.0% [78.3%, 88.4%], macro-F1=0.228.</a:t>
+              <a:t>• Event classifier (rule-v1): 88% overall accuracy across 200 blind-labelled gold examples.</a:t>
             </a:r>
           </a:p>
           <a:p>
@@ -4233,14 +4301,14 @@
               <a:spcAft>
                 <a:spcPts val="800"/>
               </a:spcAft>
-              <a:defRPr sz="1500">
+              <a:defRPr sz="1300">
                 <a:solidFill>
                   <a:srgbClr val="0B0B0B"/>
                 </a:solidFill>
               </a:defRPr>
             </a:pPr>
             <a:r>
-              <a:t>• Market data (Treasury curve, equity spot) is SOURCED, not provisional — fetched directly. (An earlier as_of-selection bug briefly mis-dated the curve; the provisional snapshot itself was always accurate for its stated date — see docs/ASSUMPTIONS.md.)</a:t>
+              <a:t>• Macroeconomic: 100% precision but only 34% recall (10 of 29) — misses most true Macroeconomic headlines.</a:t>
             </a:r>
           </a:p>
           <a:p>
@@ -4248,14 +4316,14 @@
               <a:spcAft>
                 <a:spcPts val="800"/>
               </a:spcAft>
-              <a:defRPr sz="1500">
+              <a:defRPr sz="1300">
                 <a:solidFill>
                   <a:srgbClr val="0B0B0B"/>
                 </a:solidFill>
               </a:defRPr>
             </a:pPr>
             <a:r>
-              <a:t>• English-only; GDELT gives headline-level text only (no article body); the social replay source is historical with synthetic timestamps, creating a real date mismatch against the live market snapshot.</a:t>
+              <a:t>• Credit Event: cannot be evaluated yet — only 1 example in this sample.</a:t>
             </a:r>
           </a:p>
           <a:p>
@@ -4263,14 +4331,14 @@
               <a:spcAft>
                 <a:spcPts val="800"/>
               </a:spcAft>
-              <a:defRPr sz="1500">
+              <a:defRPr sz="1300">
                 <a:solidFill>
                   <a:srgbClr val="0B0B0B"/>
                 </a:solidFill>
               </a:defRPr>
             </a:pPr>
             <a:r>
-              <a:t>• Credit loss is 1-year EL (Basel-style), not IFRS 9 lifetime ECL — a real stress scenario would typically trigger Stage 2/3 staging, so this is a lower bound, stated as such.</a:t>
+              <a:t>• Geopolitical: cannot be evaluated yet — only 2 examples in this sample.</a:t>
             </a:r>
           </a:p>
           <a:p>
@@ -4278,14 +4346,59 @@
               <a:spcAft>
                 <a:spcPts val="800"/>
               </a:spcAft>
-              <a:defRPr sz="1500">
+              <a:defRPr sz="1300">
                 <a:solidFill>
                   <a:srgbClr val="0B0B0B"/>
                 </a:solidFill>
               </a:defRPr>
             </a:pPr>
             <a:r>
-              <a:t>• Next: finish event-classification scoring once the gold set is hand-labelled. The impact-score event study has no further next step with GDELT abandoned (rate-limited, 0 articles over 2+ hours) — it would need a different news source entirely.</a:t>
+              <a:t>• Market data (Treasury curve, equity spot) is SOURCED, not provisional — fetched directly.</a:t>
+            </a:r>
+          </a:p>
+          <a:p>
+            <a:pPr>
+              <a:spcAft>
+                <a:spcPts val="800"/>
+              </a:spcAft>
+              <a:defRPr sz="1300">
+                <a:solidFill>
+                  <a:srgbClr val="0B0B0B"/>
+                </a:solidFill>
+              </a:defRPr>
+            </a:pPr>
+            <a:r>
+              <a:t>• English-only; GDELT gives headline-level text only (no article body); the social replay source is historical with synthetic timestamps, creating a real date mismatch against the live market snapshot.</a:t>
+            </a:r>
+          </a:p>
+          <a:p>
+            <a:pPr>
+              <a:spcAft>
+                <a:spcPts val="800"/>
+              </a:spcAft>
+              <a:defRPr sz="1300">
+                <a:solidFill>
+                  <a:srgbClr val="0B0B0B"/>
+                </a:solidFill>
+              </a:defRPr>
+            </a:pPr>
+            <a:r>
+              <a:t>• Credit loss is 1-year EL (Basel-style), not IFRS 9 lifetime ECL — a real stress scenario would typically trigger Stage 2/3 staging, so this is a lower bound, stated as such.</a:t>
+            </a:r>
+          </a:p>
+          <a:p>
+            <a:pPr>
+              <a:spcAft>
+                <a:spcPts val="800"/>
+              </a:spcAft>
+              <a:defRPr sz="1300">
+                <a:solidFill>
+                  <a:srgbClr val="0B0B0B"/>
+                </a:solidFill>
+              </a:defRPr>
+            </a:pPr>
+            <a:r>
+              <a:t>• Next: grow the gold sample for Credit Event and Geopolitical, which have far too few examples to evaluate yet, and investigate the Macroeconomic recall gap. The impact-score event study has no further next step with GDELT abandoned — it would need a different news source entirely.</a:t>
             </a:r>
           </a:p>
         </p:txBody>

--- a/docs/presentation.pptx
+++ b/docs/presentation.pptx
@@ -3146,8 +3146,8 @@
         </p:nvSpPr>
         <p:spPr>
           <a:xfrm>
-            <a:off x="914400" y="2377440"/>
-            <a:ext cx="10332720" cy="1645920"/>
+            <a:off x="914400" y="2103120"/>
+            <a:ext cx="10332720" cy="2011680"/>
           </a:xfrm>
           <a:prstGeom prst="rect">
             <a:avLst/>
@@ -3168,11 +3168,26 @@
               </a:defRPr>
             </a:pPr>
             <a:r>
-              <a:t>AI/NLP Risk Engine + Strategic Portfolio Stress Test</a:t>
+              <a:t>AI/NLP Risk Engine</a:t>
             </a:r>
           </a:p>
           <a:p>
             <a:pPr>
+              <a:defRPr sz="4000" b="1">
+                <a:solidFill>
+                  <a:srgbClr val="FFFFFF"/>
+                </a:solidFill>
+              </a:defRPr>
+            </a:pPr>
+            <a:r>
+              <a:t>+ Strategic Portfolio Stress Test</a:t>
+            </a:r>
+          </a:p>
+          <a:p>
+            <a:pPr>
+              <a:spcBef>
+                <a:spcPts val="1400"/>
+              </a:spcBef>
               <a:defRPr sz="1800">
                 <a:solidFill>
                   <a:srgbClr val="FFFFFF"/>
@@ -3305,7 +3320,7 @@
           <a:lstStyle/>
           <a:p>
             <a:pPr>
-              <a:defRPr sz="2200" b="1">
+              <a:defRPr sz="2400" b="1">
                 <a:solidFill>
                   <a:srgbClr val="0B0B0B"/>
                 </a:solidFill>
@@ -3325,8 +3340,81 @@
         </p:nvSpPr>
         <p:spPr>
           <a:xfrm>
-            <a:off x="457200" y="2286000"/>
-            <a:ext cx="11247120" cy="5303520"/>
+            <a:off x="457200" y="2468880"/>
+            <a:ext cx="11247120" cy="640080"/>
+          </a:xfrm>
+          <a:prstGeom prst="rect">
+            <a:avLst/>
+          </a:prstGeom>
+          <a:noFill/>
+        </p:spPr>
+        <p:txBody>
+          <a:bodyPr wrap="square">
+            <a:spAutoFit/>
+          </a:bodyPr>
+          <a:lstStyle/>
+          <a:p>
+            <a:pPr>
+              <a:spcAft>
+                <a:spcPts val="800"/>
+              </a:spcAft>
+              <a:defRPr sz="1900">
+                <a:solidFill>
+                  <a:srgbClr val="0B0B0B"/>
+                </a:solidFill>
+              </a:defRPr>
+            </a:pPr>
+            <a:r>
+              <a:t>• Built: news + social text → sentiment/event/impact signals → a real portfolio stress test.</a:t>
+            </a:r>
+          </a:p>
+        </p:txBody>
+      </p:sp>
+      <p:sp>
+        <p:nvSpPr>
+          <p:cNvPr id="6" name="TextBox 5"/>
+          <p:cNvSpPr txBox="1"/>
+          <p:nvPr/>
+        </p:nvSpPr>
+        <p:spPr>
+          <a:xfrm>
+            <a:off x="457200" y="3291840"/>
+            <a:ext cx="5394960" cy="365760"/>
+          </a:xfrm>
+          <a:prstGeom prst="rect">
+            <a:avLst/>
+          </a:prstGeom>
+          <a:noFill/>
+        </p:spPr>
+        <p:txBody>
+          <a:bodyPr wrap="none">
+            <a:spAutoFit/>
+          </a:bodyPr>
+          <a:lstStyle/>
+          <a:p>
+            <a:pPr>
+              <a:defRPr sz="1500" b="1">
+                <a:solidFill>
+                  <a:srgbClr val="2A78D6"/>
+                </a:solidFill>
+              </a:defRPr>
+            </a:pPr>
+            <a:r>
+              <a:t>What we built it with</a:t>
+            </a:r>
+          </a:p>
+        </p:txBody>
+      </p:sp>
+      <p:sp>
+        <p:nvSpPr>
+          <p:cNvPr id="7" name="TextBox 6"/>
+          <p:cNvSpPr txBox="1"/>
+          <p:nvPr/>
+        </p:nvSpPr>
+        <p:spPr>
+          <a:xfrm>
+            <a:off x="457200" y="3749039"/>
+            <a:ext cx="5394960" cy="2743200"/>
           </a:xfrm>
           <a:prstGeom prst="rect">
             <a:avLst/>
@@ -3350,7 +3438,7 @@
               </a:defRPr>
             </a:pPr>
             <a:r>
-              <a:t>• Build: ingest news + social text → structured sentiment/event/impact signals → trigger a real portfolio stress test.</a:t>
+              <a:t>• Verify every external claim live — never report a number a script didn't actually produce.</a:t>
             </a:r>
           </a:p>
           <a:p>
@@ -3365,9 +3453,67 @@
               </a:defRPr>
             </a:pPr>
             <a:r>
-              <a:t>• Three real assumptions that turned out false on inspection, adapted rather than worked around: X/Twitter has no free read API in 2026 (switched to Mastodon); FinBERT is fine-tuned on Financial PhraseBank, so we evaluated it on a disjoint dataset to avoid leakage; a naive "Target Corp" name match collided with "price target" in nearly every analyst note (fixed with cashtag + context rules).</a:t>
-            </a:r>
-          </a:p>
+              <a:t>• Two sources, one engine: live Mastodon posts and a historical tweet-replay fallback.</a:t>
+            </a:r>
+          </a:p>
+        </p:txBody>
+      </p:sp>
+      <p:sp>
+        <p:nvSpPr>
+          <p:cNvPr id="8" name="TextBox 7"/>
+          <p:cNvSpPr txBox="1"/>
+          <p:nvPr/>
+        </p:nvSpPr>
+        <p:spPr>
+          <a:xfrm>
+            <a:off x="6217920" y="3291840"/>
+            <a:ext cx="5394960" cy="365760"/>
+          </a:xfrm>
+          <a:prstGeom prst="rect">
+            <a:avLst/>
+          </a:prstGeom>
+          <a:noFill/>
+        </p:spPr>
+        <p:txBody>
+          <a:bodyPr wrap="none">
+            <a:spAutoFit/>
+          </a:bodyPr>
+          <a:lstStyle/>
+          <a:p>
+            <a:pPr>
+              <a:defRPr sz="1500" b="1">
+                <a:solidFill>
+                  <a:srgbClr val="2A78D6"/>
+                </a:solidFill>
+              </a:defRPr>
+            </a:pPr>
+            <a:r>
+              <a:t>Assumptions that turned out false</a:t>
+            </a:r>
+          </a:p>
+        </p:txBody>
+      </p:sp>
+      <p:sp>
+        <p:nvSpPr>
+          <p:cNvPr id="9" name="TextBox 8"/>
+          <p:cNvSpPr txBox="1"/>
+          <p:nvPr/>
+        </p:nvSpPr>
+        <p:spPr>
+          <a:xfrm>
+            <a:off x="6217920" y="3749039"/>
+            <a:ext cx="5394960" cy="2743200"/>
+          </a:xfrm>
+          <a:prstGeom prst="rect">
+            <a:avLst/>
+          </a:prstGeom>
+          <a:noFill/>
+        </p:spPr>
+        <p:txBody>
+          <a:bodyPr wrap="square">
+            <a:spAutoFit/>
+          </a:bodyPr>
+          <a:lstStyle/>
           <a:p>
             <a:pPr>
               <a:spcAft>
@@ -3380,7 +3526,37 @@
               </a:defRPr>
             </a:pPr>
             <a:r>
-              <a:t>• Discipline throughout: verify every external claim live, never report a number a script didn't actually produce.</a:t>
+              <a:t>• X/Twitter has no free read API in 2026 → switched to Mastodon.</a:t>
+            </a:r>
+          </a:p>
+          <a:p>
+            <a:pPr>
+              <a:spcAft>
+                <a:spcPts val="800"/>
+              </a:spcAft>
+              <a:defRPr sz="1800">
+                <a:solidFill>
+                  <a:srgbClr val="0B0B0B"/>
+                </a:solidFill>
+              </a:defRPr>
+            </a:pPr>
+            <a:r>
+              <a:t>• FinBERT is fine-tuned on Financial PhraseBank → evaluated on a disjoint dataset to avoid leakage.</a:t>
+            </a:r>
+          </a:p>
+          <a:p>
+            <a:pPr>
+              <a:spcAft>
+                <a:spcPts val="800"/>
+              </a:spcAft>
+              <a:defRPr sz="1800">
+                <a:solidFill>
+                  <a:srgbClr val="0B0B0B"/>
+                </a:solidFill>
+              </a:defRPr>
+            </a:pPr>
+            <a:r>
+              <a:t>• Entity linking: naive name match scored 30% precision (18/61) → cashtag + context rules reached 91.7% (44/48), confirmed 94.5% (52/55) on a fresh sample.</a:t>
             </a:r>
           </a:p>
         </p:txBody>
@@ -3629,14 +3805,14 @@
               <a:spcAft>
                 <a:spcPts val="800"/>
               </a:spcAft>
-              <a:defRPr sz="1600">
+              <a:defRPr sz="1800">
                 <a:solidFill>
                   <a:srgbClr val="0B0B0B"/>
                 </a:solidFill>
               </a:defRPr>
             </a:pPr>
             <a:r>
-              <a:t>• FinBERT (primary) vs VADER (naive baseline) vs majority-class, scored with bootstrap 95% CIs, not point estimates alone.</a:t>
+              <a:t>• FinBERT vs VADER vs majority-class — scored with bootstrap 95% CIs, not point estimates alone.</a:t>
             </a:r>
           </a:p>
           <a:p>
@@ -3644,14 +3820,14 @@
               <a:spcAft>
                 <a:spcPts val="800"/>
               </a:spcAft>
-              <a:defRPr sz="1600">
+              <a:defRPr sz="1800">
                 <a:solidFill>
                   <a:srgbClr val="0B0B0B"/>
                 </a:solidFill>
               </a:defRPr>
             </a:pPr>
             <a:r>
-              <a:t>• Event classifier frozen at rule-v1 (git tag classifier-v1) before scoring against hand-labelled gold data — no eval-set tuning.</a:t>
+              <a:t>• Event classifier frozen before scoring against hand-labelled gold data — no eval-set tuning.</a:t>
             </a:r>
           </a:p>
           <a:p>
@@ -3659,14 +3835,14 @@
               <a:spcAft>
                 <a:spcPts val="800"/>
               </a:spcAft>
-              <a:defRPr sz="1600">
+              <a:defRPr sz="1800">
                 <a:solidFill>
                   <a:srgbClr val="0B0B0B"/>
                 </a:solidFill>
               </a:defRPr>
             </a:pPr>
             <a:r>
-              <a:t>• Polling-based pub/sub (FastAPI + a flat JSONL file), documented honestly as polling, not a real message bus.</a:t>
+              <a:t>• Polling-based pub/sub (FastAPI + a flat file) — documented honestly as polling, not a real message bus.</a:t>
             </a:r>
           </a:p>
           <a:p>
@@ -3674,14 +3850,14 @@
               <a:spcAft>
                 <a:spcPts val="800"/>
               </a:spcAft>
-              <a:defRPr sz="1600">
+              <a:defRPr sz="1800">
                 <a:solidFill>
                   <a:srgbClr val="0B0B0B"/>
                 </a:solidFill>
               </a:defRPr>
             </a:pPr>
             <a:r>
-              <a:t>• Module B: full cashflow reprice for bonds, swap DV01 via bump-and-reprice, closed-form Black-Scholes for options — compared against the required naive (duration/delta-only) approximation, not just implemented once.</a:t>
+              <a:t>• Full cashflow reprice for bonds, swap DV01 via bump-and-reprice, closed-form Black-Scholes for options — each compared against the required naive approximation, not just implemented once.</a:t>
             </a:r>
           </a:p>
           <a:p>
@@ -3689,14 +3865,14 @@
               <a:spcAft>
                 <a:spcPts val="800"/>
               </a:spcAft>
-              <a:defRPr sz="1600">
+              <a:defRPr sz="1800">
                 <a:solidFill>
                   <a:srgbClr val="0B0B0B"/>
                 </a:solidFill>
               </a:defRPr>
             </a:pPr>
             <a:r>
-              <a:t>• Mark-to-market P&amp;L and credit loss (ΔEL on loans) kept as two separate numbers by construction — a loan is never both fair-valued AND provisioned, which would double-count the same credit deterioration.</a:t>
+              <a:t>• Mark-to-market P&amp;L and credit loss kept as two separate numbers — a position is never both fair-valued and provisioned for the same deterioration.</a:t>
             </a:r>
           </a:p>
           <a:p>
@@ -3704,14 +3880,14 @@
               <a:spcAft>
                 <a:spcPts val="800"/>
               </a:spcAft>
-              <a:defRPr sz="1600">
+              <a:defRPr sz="1800">
                 <a:solidFill>
                   <a:srgbClr val="0B0B0B"/>
                 </a:solidFill>
               </a:defRPr>
             </a:pPr>
             <a:r>
-              <a:t>• Demo mode verified byte-identical across two real end-to-end runs (tests/test_demo_idempotency.py).</a:t>
+              <a:t>• Demo mode verified byte-identical across two real end-to-end runs, by a dedicated automated test.</a:t>
             </a:r>
           </a:p>
         </p:txBody>
@@ -3813,9 +3989,77 @@
           </a:p>
         </p:txBody>
       </p:sp>
+      <p:sp>
+        <p:nvSpPr>
+          <p:cNvPr id="4" name="TextBox 3"/>
+          <p:cNvSpPr txBox="1"/>
+          <p:nvPr/>
+        </p:nvSpPr>
+        <p:spPr>
+          <a:xfrm>
+            <a:off x="457200" y="1051560"/>
+            <a:ext cx="11247120" cy="1371600"/>
+          </a:xfrm>
+          <a:prstGeom prst="rect">
+            <a:avLst/>
+          </a:prstGeom>
+          <a:noFill/>
+        </p:spPr>
+        <p:txBody>
+          <a:bodyPr wrap="square">
+            <a:spAutoFit/>
+          </a:bodyPr>
+          <a:lstStyle/>
+          <a:p>
+            <a:pPr>
+              <a:spcAft>
+                <a:spcPts val="800"/>
+              </a:spcAft>
+              <a:defRPr sz="1800">
+                <a:solidFill>
+                  <a:srgbClr val="0B0B0B"/>
+                </a:solidFill>
+              </a:defRPr>
+            </a:pPr>
+            <a:r>
+              <a:t>• FinBERT 0.660 macro-F1 vs VADER 0.453 vs majority-class 0.267 (n=2000) — bearish recall 76.5%.</a:t>
+            </a:r>
+          </a:p>
+          <a:p>
+            <a:pPr>
+              <a:spcAft>
+                <a:spcPts val="800"/>
+              </a:spcAft>
+              <a:defRPr sz="1800">
+                <a:solidFill>
+                  <a:srgbClr val="0B0B0B"/>
+                </a:solidFill>
+              </a:defRPr>
+            </a:pPr>
+            <a:r>
+              <a:t>• 76 real signals evaluated, 3 fired. Naive reprice error reaches 0.42% of position value — genuine convexity effect.</a:t>
+            </a:r>
+          </a:p>
+          <a:p>
+            <a:pPr>
+              <a:spcAft>
+                <a:spcPts val="800"/>
+              </a:spcAft>
+              <a:defRPr sz="1800">
+                <a:solidFill>
+                  <a:srgbClr val="0B0B0B"/>
+                </a:solidFill>
+              </a:defRPr>
+            </a:pPr>
+            <a:r>
+              <a:t>• Event classifier: 88.5% vs 84.0% always-'Other' baseline; Macroeconomic precision 100%, recall 34%.</a:t>
+            </a:r>
+          </a:p>
+        </p:txBody>
+      </p:sp>
       <p:pic>
         <p:nvPicPr>
-          <p:cNvPr id="4" name="Picture 3" descr="live_signal_feed.png"/>
+          <p:cNvPr id="5" name="Picture 4" descr="sentiment_chart.png"/>
           <p:cNvPicPr>
             <a:picLocks noChangeAspect="1"/>
           </p:cNvPicPr>
@@ -3829,8 +4073,8 @@
         </p:blipFill>
         <p:spPr>
           <a:xfrm>
-            <a:off x="274320" y="1051560"/>
-            <a:ext cx="3749039" cy="1641723"/>
+            <a:off x="457200" y="2514600"/>
+            <a:ext cx="5486400" cy="3291839"/>
           </a:xfrm>
           <a:prstGeom prst="rect">
             <a:avLst/>
@@ -3839,7 +4083,7 @@
       </p:pic>
       <p:pic>
         <p:nvPicPr>
-          <p:cNvPr id="5" name="Picture 4" descr="stress_test.png"/>
+          <p:cNvPr id="6" name="Picture 5" descr="stress_test_chart.png"/>
           <p:cNvPicPr>
             <a:picLocks noChangeAspect="1"/>
           </p:cNvPicPr>
@@ -3853,117 +4097,83 @@
         </p:blipFill>
         <p:spPr>
           <a:xfrm>
-            <a:off x="4160520" y="1051560"/>
-            <a:ext cx="3749039" cy="1111217"/>
+            <a:off x="6217920" y="2514600"/>
+            <a:ext cx="5486400" cy="3291839"/>
           </a:xfrm>
           <a:prstGeom prst="rect">
             <a:avLst/>
           </a:prstGeom>
         </p:spPr>
       </p:pic>
-      <p:pic>
-        <p:nvPicPr>
-          <p:cNvPr id="6" name="Picture 5" descr="scenario_explorer.png"/>
-          <p:cNvPicPr>
-            <a:picLocks noChangeAspect="1"/>
-          </p:cNvPicPr>
+      <p:sp>
+        <p:nvSpPr>
+          <p:cNvPr id="7" name="Rounded Rectangle 6"/>
+          <p:cNvSpPr/>
           <p:nvPr/>
-        </p:nvPicPr>
-        <p:blipFill>
-          <a:blip r:embed="rId4"/>
-          <a:stretch>
-            <a:fillRect/>
-          </a:stretch>
-        </p:blipFill>
-        <p:spPr>
-          <a:xfrm>
-            <a:off x="8046720" y="1051560"/>
-            <a:ext cx="3749039" cy="1396826"/>
-          </a:xfrm>
-          <a:prstGeom prst="rect">
+        </p:nvSpPr>
+        <p:spPr>
+          <a:xfrm>
+            <a:off x="457200" y="5943600"/>
+            <a:ext cx="11247120" cy="731520"/>
+          </a:xfrm>
+          <a:prstGeom prst="roundRect">
             <a:avLst/>
           </a:prstGeom>
-        </p:spPr>
-      </p:pic>
-      <p:sp>
-        <p:nvSpPr>
-          <p:cNvPr id="7" name="TextBox 6"/>
-          <p:cNvSpPr txBox="1"/>
-          <p:nvPr/>
-        </p:nvSpPr>
-        <p:spPr>
-          <a:xfrm>
-            <a:off x="274320" y="4846320"/>
-            <a:ext cx="11521440" cy="1737360"/>
-          </a:xfrm>
-          <a:prstGeom prst="rect">
-            <a:avLst/>
-          </a:prstGeom>
-          <a:noFill/>
-        </p:spPr>
-        <p:txBody>
-          <a:bodyPr wrap="square">
-            <a:spAutoFit/>
-          </a:bodyPr>
-          <a:lstStyle/>
+          <a:solidFill>
+            <a:srgbClr val="F2F6FC"/>
+          </a:solidFill>
+          <a:ln w="19050">
+            <a:solidFill>
+              <a:srgbClr val="2A78D6"/>
+            </a:solidFill>
+          </a:ln>
+          <a:effectLst/>
+        </p:spPr>
+        <p:style>
+          <a:lnRef idx="1">
+            <a:schemeClr val="accent1"/>
+          </a:lnRef>
+          <a:fillRef idx="3">
+            <a:schemeClr val="accent1"/>
+          </a:fillRef>
+          <a:effectRef idx="2">
+            <a:schemeClr val="accent1"/>
+          </a:effectRef>
+          <a:fontRef idx="minor">
+            <a:schemeClr val="lt1"/>
+          </a:fontRef>
+        </p:style>
+        <p:txBody>
+          <a:bodyPr rtlCol="0" anchor="ctr" wrap="square" lIns="228600" rIns="228600" tIns="109728" bIns="109728"/>
+          <a:lstStyle/>
+          <a:p>
+            <a:pPr algn="ctr">
+              <a:spcAft>
+                <a:spcPts val="400"/>
+              </a:spcAft>
+              <a:defRPr sz="2000" b="1">
+                <a:solidFill>
+                  <a:srgbClr val="0B0B0B"/>
+                </a:solidFill>
+              </a:defRPr>
+            </a:pPr>
+            <a:r>
+              <a:t>Headline result: total stressed loss -$13,793,557 (-2.09%)</a:t>
+            </a:r>
+          </a:p>
           <a:p>
             <a:pPr>
               <a:spcAft>
-                <a:spcPts val="300"/>
+                <a:spcPts val="400"/>
               </a:spcAft>
-              <a:defRPr sz="1150">
+              <a:defRPr sz="1400" b="0">
                 <a:solidFill>
                   <a:srgbClr val="0B0B0B"/>
                 </a:solidFill>
               </a:defRPr>
             </a:pPr>
             <a:r>
-              <a:t>FinBERT 0.660 macro-F1 [0.635, 0.684] vs VADER 0.453 vs majority-class 0.267 (n=2000, CIs don't overlap — real improvement). Bearish recall 76.5%. 138ms/doc on CPU.</a:t>
-            </a:r>
-          </a:p>
-          <a:p>
-            <a:pPr>
-              <a:spcAft>
-                <a:spcPts val="300"/>
-              </a:spcAft>
-              <a:defRPr sz="1150">
-                <a:solidFill>
-                  <a:srgbClr val="0B0B0B"/>
-                </a:solidFill>
-              </a:defRPr>
-            </a:pPr>
-            <a:r>
-              <a:t>76 real signals evaluated, 3 fired a stress test. Naive duration-only error grows to 0.42% of position value at -200bp vs. full reprice — genuine, growing convexity error, confirmed by tests.</a:t>
-            </a:r>
-          </a:p>
-          <a:p>
-            <a:pPr>
-              <a:spcAft>
-                <a:spcPts val="300"/>
-              </a:spcAft>
-              <a:defRPr sz="1150">
-                <a:solidFill>
-                  <a:srgbClr val="0B0B0B"/>
-                </a:solidFill>
-              </a:defRPr>
-            </a:pPr>
-            <a:r>
-              <a:t>Event classifier (rule-v1): 88% overall accuracy, n=200 blind-labelled gold examples.</a:t>
-            </a:r>
-          </a:p>
-          <a:p>
-            <a:pPr>
-              <a:spcAft>
-                <a:spcPts val="300"/>
-              </a:spcAft>
-              <a:defRPr sz="1150">
-                <a:solidFill>
-                  <a:srgbClr val="0B0B0B"/>
-                </a:solidFill>
-              </a:defRPr>
-            </a:pPr>
-            <a:r>
-              <a:t>Headline stress result: portfolio value $658,497,132 -&gt; $644,703,575, total loss $-13,793,557 (-2.09%) — MTM P&amp;L $1,302,523, credit loss $15,096,079.</a:t>
+              <a:t>= MTM P&amp;L +$1,302,523  +  credit loss -$15,096,079</a:t>
             </a:r>
           </a:p>
         </p:txBody>
@@ -4073,8 +4283,8 @@
         </p:nvSpPr>
         <p:spPr>
           <a:xfrm>
-            <a:off x="457200" y="1188720"/>
-            <a:ext cx="11247120" cy="5303520"/>
+            <a:off x="457200" y="1051560"/>
+            <a:ext cx="11247120" cy="731520"/>
           </a:xfrm>
           <a:prstGeom prst="rect">
             <a:avLst/>
@@ -4091,29 +4301,87 @@
               <a:spcAft>
                 <a:spcPts val="800"/>
               </a:spcAft>
-              <a:defRPr sz="1700">
+              <a:defRPr sz="1900">
                 <a:solidFill>
                   <a:srgbClr val="0B0B0B"/>
                 </a:solidFill>
               </a:defRPr>
             </a:pPr>
             <a:r>
-              <a:t>• Translates a news/social firehose into a dollar P&amp;L number a credit/risk desk can act on, with full traceability: signal → scenario → shock → P&amp;L (visible in the dashboard's Audit Log tab).</a:t>
-            </a:r>
-          </a:p>
+              <a:t>• Translates headlines into a dollar P&amp;L a risk desk can act on — signal → scenario → shock → P&amp;L, fully traceable.</a:t>
+            </a:r>
+          </a:p>
+        </p:txBody>
+      </p:sp>
+      <p:sp>
+        <p:nvSpPr>
+          <p:cNvPr id="5" name="TextBox 4"/>
+          <p:cNvSpPr txBox="1"/>
+          <p:nvPr/>
+        </p:nvSpPr>
+        <p:spPr>
+          <a:xfrm>
+            <a:off x="457200" y="2011680"/>
+            <a:ext cx="5394960" cy="365760"/>
+          </a:xfrm>
+          <a:prstGeom prst="rect">
+            <a:avLst/>
+          </a:prstGeom>
+          <a:noFill/>
+        </p:spPr>
+        <p:txBody>
+          <a:bodyPr wrap="none">
+            <a:spAutoFit/>
+          </a:bodyPr>
+          <a:lstStyle/>
+          <a:p>
+            <a:pPr>
+              <a:defRPr sz="1500" b="1">
+                <a:solidFill>
+                  <a:srgbClr val="2A78D6"/>
+                </a:solidFill>
+              </a:defRPr>
+            </a:pPr>
+            <a:r>
+              <a:t>Mirrors real risk-desk practice</a:t>
+            </a:r>
+          </a:p>
+        </p:txBody>
+      </p:sp>
+      <p:sp>
+        <p:nvSpPr>
+          <p:cNvPr id="6" name="TextBox 5"/>
+          <p:cNvSpPr txBox="1"/>
+          <p:nvPr/>
+        </p:nvSpPr>
+        <p:spPr>
+          <a:xfrm>
+            <a:off x="457200" y="2468880"/>
+            <a:ext cx="5394960" cy="3200400"/>
+          </a:xfrm>
+          <a:prstGeom prst="rect">
+            <a:avLst/>
+          </a:prstGeom>
+          <a:noFill/>
+        </p:spPr>
+        <p:txBody>
+          <a:bodyPr wrap="square">
+            <a:spAutoFit/>
+          </a:bodyPr>
+          <a:lstStyle/>
           <a:p>
             <a:pPr>
               <a:spcAft>
                 <a:spcPts val="800"/>
               </a:spcAft>
-              <a:defRPr sz="1700">
+              <a:defRPr sz="1800">
                 <a:solidFill>
                   <a:srgbClr val="0B0B0B"/>
                 </a:solidFill>
               </a:defRPr>
             </a:pPr>
             <a:r>
-              <a:t>• Separating MTM P&amp;L from credit loss mirrors how a real risk desk actually reports exposure — a trading-book instrument and a banking-book loan are never collapsed into one undifferentiated number.</a:t>
+              <a:t>• MTM P&amp;L and credit loss stay separate — a trading-book instrument and a banking-book loan are never collapsed into one number.</a:t>
             </a:r>
           </a:p>
           <a:p>
@@ -4121,14 +4389,14 @@
               <a:spcAft>
                 <a:spcPts val="800"/>
               </a:spcAft>
-              <a:defRPr sz="1700">
+              <a:defRPr sz="1800">
                 <a:solidFill>
                   <a:srgbClr val="0B0B0B"/>
                 </a:solidFill>
               </a:defRPr>
             </a:pPr>
             <a:r>
-              <a:t>• Shock magnitudes anchored to the Federal Reserve's own published severely-adverse scenario (fetched and cited directly, not estimated) — domain-grounded, not arbitrary round numbers.</a:t>
+              <a:t>• Shocks anchored to the Fed's own severely-adverse scenario — sourced, not arbitrary round numbers.</a:t>
             </a:r>
           </a:p>
           <a:p>
@@ -4136,14 +4404,87 @@
               <a:spcAft>
                 <a:spcPts val="800"/>
               </a:spcAft>
-              <a:defRPr sz="1700">
+              <a:defRPr sz="1800">
                 <a:solidFill>
                   <a:srgbClr val="0B0B0B"/>
                 </a:solidFill>
               </a:defRPr>
             </a:pPr>
             <a:r>
-              <a:t>• Fits S&amp;P Global / Crisil's own domain: the signal taxonomy spans credit events, rating-adjacent language, and portfolio-level stress — the same surface a ratings/risk-analytics business operates on. (Credit-event detection itself isn't validated yet — too little gold-labelled data so far, see Limitations.)</a:t>
+              <a:t>• Taxonomy spans credit events, rating-adjacent language, portfolio stress — the surface a ratings/risk-analytics business operates on. (Credit-event detection itself isn't validated yet.)</a:t>
+            </a:r>
+          </a:p>
+        </p:txBody>
+      </p:sp>
+      <p:sp>
+        <p:nvSpPr>
+          <p:cNvPr id="7" name="Rounded Rectangle 6"/>
+          <p:cNvSpPr/>
+          <p:nvPr/>
+        </p:nvSpPr>
+        <p:spPr>
+          <a:xfrm>
+            <a:off x="6217920" y="2468880"/>
+            <a:ext cx="5394960" cy="1828800"/>
+          </a:xfrm>
+          <a:prstGeom prst="roundRect">
+            <a:avLst/>
+          </a:prstGeom>
+          <a:solidFill>
+            <a:srgbClr val="F2F6FC"/>
+          </a:solidFill>
+          <a:ln w="19050">
+            <a:solidFill>
+              <a:srgbClr val="2A78D6"/>
+            </a:solidFill>
+          </a:ln>
+          <a:effectLst/>
+        </p:spPr>
+        <p:style>
+          <a:lnRef idx="1">
+            <a:schemeClr val="accent1"/>
+          </a:lnRef>
+          <a:fillRef idx="3">
+            <a:schemeClr val="accent1"/>
+          </a:fillRef>
+          <a:effectRef idx="2">
+            <a:schemeClr val="accent1"/>
+          </a:effectRef>
+          <a:fontRef idx="minor">
+            <a:schemeClr val="lt1"/>
+          </a:fontRef>
+        </p:style>
+        <p:txBody>
+          <a:bodyPr rtlCol="0" anchor="ctr" wrap="square" lIns="228600" rIns="228600" tIns="109728" bIns="109728"/>
+          <a:lstStyle/>
+          <a:p>
+            <a:pPr algn="ctr">
+              <a:spcAft>
+                <a:spcPts val="400"/>
+              </a:spcAft>
+              <a:defRPr sz="2400" b="1">
+                <a:solidFill>
+                  <a:srgbClr val="0B0B0B"/>
+                </a:solidFill>
+              </a:defRPr>
+            </a:pPr>
+            <a:r>
+              <a:t>$13,793,557 real stressed loss</a:t>
+            </a:r>
+          </a:p>
+          <a:p>
+            <a:pPr>
+              <a:spcAft>
+                <a:spcPts val="400"/>
+              </a:spcAft>
+              <a:defRPr sz="1500" b="0">
+                <a:solidFill>
+                  <a:srgbClr val="0B0B0B"/>
+                </a:solidFill>
+              </a:defRPr>
+            </a:pPr>
+            <a:r>
+              <a:t>2.09% of portfolio value, from one real headline</a:t>
             </a:r>
           </a:p>
         </p:txBody>
@@ -4253,8 +4594,8 @@
         </p:nvSpPr>
         <p:spPr>
           <a:xfrm>
-            <a:off x="457200" y="1188720"/>
-            <a:ext cx="11247120" cy="5303520"/>
+            <a:off x="457200" y="1143000"/>
+            <a:ext cx="5394960" cy="365760"/>
           </a:xfrm>
           <a:prstGeom prst="rect">
             <a:avLst/>
@@ -4262,6 +4603,41 @@
           <a:noFill/>
         </p:spPr>
         <p:txBody>
+          <a:bodyPr wrap="none">
+            <a:spAutoFit/>
+          </a:bodyPr>
+          <a:lstStyle/>
+          <a:p>
+            <a:pPr>
+              <a:defRPr sz="1500" b="1">
+                <a:solidFill>
+                  <a:srgbClr val="2A78D6"/>
+                </a:solidFill>
+              </a:defRPr>
+            </a:pPr>
+            <a:r>
+              <a:t>Evaluation status</a:t>
+            </a:r>
+          </a:p>
+        </p:txBody>
+      </p:sp>
+      <p:sp>
+        <p:nvSpPr>
+          <p:cNvPr id="5" name="TextBox 4"/>
+          <p:cNvSpPr txBox="1"/>
+          <p:nvPr/>
+        </p:nvSpPr>
+        <p:spPr>
+          <a:xfrm>
+            <a:off x="457200" y="1600200"/>
+            <a:ext cx="5394960" cy="4114800"/>
+          </a:xfrm>
+          <a:prstGeom prst="rect">
+            <a:avLst/>
+          </a:prstGeom>
+          <a:noFill/>
+        </p:spPr>
+        <p:txBody>
           <a:bodyPr wrap="square">
             <a:spAutoFit/>
           </a:bodyPr>
@@ -4271,14 +4647,14 @@
               <a:spcAft>
                 <a:spcPts val="800"/>
               </a:spcAft>
-              <a:defRPr sz="1300">
+              <a:defRPr sz="1800">
                 <a:solidFill>
                   <a:srgbClr val="0B0B0B"/>
                 </a:solidFill>
               </a:defRPr>
             </a:pPr>
             <a:r>
-              <a:t>• Impact-score event study: not run — GDELT rate-limited: HTTP 429 returned on every query for 2+ hours (0 articles returned). Abandoned as a data source for this submission.</a:t>
+              <a:t>• Impact-score event study: not run — GDELT rate-limited (0 articles over 2+ hours), abandoned for this submission.</a:t>
             </a:r>
           </a:p>
           <a:p>
@@ -4286,14 +4662,14 @@
               <a:spcAft>
                 <a:spcPts val="800"/>
               </a:spcAft>
-              <a:defRPr sz="1300">
+              <a:defRPr sz="1800">
                 <a:solidFill>
                   <a:srgbClr val="0B0B0B"/>
                 </a:solidFill>
               </a:defRPr>
             </a:pPr>
             <a:r>
-              <a:t>• Event classifier (rule-v1): 88% overall accuracy across 200 blind-labelled gold examples.</a:t>
+              <a:t>• Event classifier: 88.5% vs 84.0% always-'Other' baseline; Macroeconomic precision 100%, recall 34%.</a:t>
             </a:r>
           </a:p>
           <a:p>
@@ -4301,14 +4677,14 @@
               <a:spcAft>
                 <a:spcPts val="800"/>
               </a:spcAft>
-              <a:defRPr sz="1300">
+              <a:defRPr sz="1800">
                 <a:solidFill>
                   <a:srgbClr val="0B0B0B"/>
                 </a:solidFill>
               </a:defRPr>
             </a:pPr>
             <a:r>
-              <a:t>• Macroeconomic: 100% precision but only 34% recall (10 of 29) — misses most true Macroeconomic headlines.</a:t>
+              <a:t>• Credit Event: too few examples to evaluate (n=1).</a:t>
             </a:r>
           </a:p>
           <a:p>
@@ -4316,29 +4692,87 @@
               <a:spcAft>
                 <a:spcPts val="800"/>
               </a:spcAft>
-              <a:defRPr sz="1300">
+              <a:defRPr sz="1800">
                 <a:solidFill>
                   <a:srgbClr val="0B0B0B"/>
                 </a:solidFill>
               </a:defRPr>
             </a:pPr>
             <a:r>
-              <a:t>• Credit Event: cannot be evaluated yet — only 1 example in this sample.</a:t>
-            </a:r>
-          </a:p>
+              <a:t>• Geopolitical: too few examples to evaluate (n=2).</a:t>
+            </a:r>
+          </a:p>
+        </p:txBody>
+      </p:sp>
+      <p:sp>
+        <p:nvSpPr>
+          <p:cNvPr id="6" name="TextBox 5"/>
+          <p:cNvSpPr txBox="1"/>
+          <p:nvPr/>
+        </p:nvSpPr>
+        <p:spPr>
+          <a:xfrm>
+            <a:off x="6217920" y="1143000"/>
+            <a:ext cx="5394960" cy="365760"/>
+          </a:xfrm>
+          <a:prstGeom prst="rect">
+            <a:avLst/>
+          </a:prstGeom>
+          <a:noFill/>
+        </p:spPr>
+        <p:txBody>
+          <a:bodyPr wrap="none">
+            <a:spAutoFit/>
+          </a:bodyPr>
+          <a:lstStyle/>
+          <a:p>
+            <a:pPr>
+              <a:defRPr sz="1500" b="1">
+                <a:solidFill>
+                  <a:srgbClr val="2A78D6"/>
+                </a:solidFill>
+              </a:defRPr>
+            </a:pPr>
+            <a:r>
+              <a:t>Known limitations &amp; next steps</a:t>
+            </a:r>
+          </a:p>
+        </p:txBody>
+      </p:sp>
+      <p:sp>
+        <p:nvSpPr>
+          <p:cNvPr id="7" name="TextBox 6"/>
+          <p:cNvSpPr txBox="1"/>
+          <p:nvPr/>
+        </p:nvSpPr>
+        <p:spPr>
+          <a:xfrm>
+            <a:off x="6217920" y="1600200"/>
+            <a:ext cx="5394960" cy="4114800"/>
+          </a:xfrm>
+          <a:prstGeom prst="rect">
+            <a:avLst/>
+          </a:prstGeom>
+          <a:noFill/>
+        </p:spPr>
+        <p:txBody>
+          <a:bodyPr wrap="square">
+            <a:spAutoFit/>
+          </a:bodyPr>
+          <a:lstStyle/>
           <a:p>
             <a:pPr>
               <a:spcAft>
                 <a:spcPts val="800"/>
               </a:spcAft>
-              <a:defRPr sz="1300">
+              <a:defRPr sz="1800">
                 <a:solidFill>
                   <a:srgbClr val="0B0B0B"/>
                 </a:solidFill>
               </a:defRPr>
             </a:pPr>
             <a:r>
-              <a:t>• Geopolitical: cannot be evaluated yet — only 2 examples in this sample.</a:t>
+              <a:t>• Market data is SOURCED, not provisional — fetched directly.</a:t>
             </a:r>
           </a:p>
           <a:p>
@@ -4346,14 +4780,14 @@
               <a:spcAft>
                 <a:spcPts val="800"/>
               </a:spcAft>
-              <a:defRPr sz="1300">
+              <a:defRPr sz="1800">
                 <a:solidFill>
                   <a:srgbClr val="0B0B0B"/>
                 </a:solidFill>
               </a:defRPr>
             </a:pPr>
             <a:r>
-              <a:t>• Market data (Treasury curve, equity spot) is SOURCED, not provisional — fetched directly.</a:t>
+              <a:t>• English-only; GDELT is headline-only; the social replay source has synthetic timestamps.</a:t>
             </a:r>
           </a:p>
           <a:p>
@@ -4361,14 +4795,14 @@
               <a:spcAft>
                 <a:spcPts val="800"/>
               </a:spcAft>
-              <a:defRPr sz="1300">
+              <a:defRPr sz="1800">
                 <a:solidFill>
                   <a:srgbClr val="0B0B0B"/>
                 </a:solidFill>
               </a:defRPr>
             </a:pPr>
             <a:r>
-              <a:t>• English-only; GDELT gives headline-level text only (no article body); the social replay source is historical with synthetic timestamps, creating a real date mismatch against the live market snapshot.</a:t>
+              <a:t>• Credit loss is 1-year EL, not IFRS 9 lifetime — a lower bound, stated as such.</a:t>
             </a:r>
           </a:p>
           <a:p>
@@ -4376,29 +4810,14 @@
               <a:spcAft>
                 <a:spcPts val="800"/>
               </a:spcAft>
-              <a:defRPr sz="1300">
+              <a:defRPr sz="1800">
                 <a:solidFill>
                   <a:srgbClr val="0B0B0B"/>
                 </a:solidFill>
               </a:defRPr>
             </a:pPr>
             <a:r>
-              <a:t>• Credit loss is 1-year EL (Basel-style), not IFRS 9 lifetime ECL — a real stress scenario would typically trigger Stage 2/3 staging, so this is a lower bound, stated as such.</a:t>
-            </a:r>
-          </a:p>
-          <a:p>
-            <a:pPr>
-              <a:spcAft>
-                <a:spcPts val="800"/>
-              </a:spcAft>
-              <a:defRPr sz="1300">
-                <a:solidFill>
-                  <a:srgbClr val="0B0B0B"/>
-                </a:solidFill>
-              </a:defRPr>
-            </a:pPr>
-            <a:r>
-              <a:t>• Next: grow the gold sample for Credit Event and Geopolitical, which have far too few examples to evaluate yet, and investigate the Macroeconomic recall gap. The impact-score event study has no further next step with GDELT abandoned — it would need a different news source entirely.</a:t>
+              <a:t>• Next: grow the Credit Event / Geopolitical samples; investigate the Macroeconomic recall gap.</a:t>
             </a:r>
           </a:p>
         </p:txBody>

--- a/docs/presentation.pptx
+++ b/docs/presentation.pptx
@@ -5,15 +5,15 @@
     <p:sldMasterId id="2147483648" r:id="rId1"/>
   </p:sldMasterIdLst>
   <p:sldIdLst>
-    <p:sldId id="256" r:id="rId7"/>
-    <p:sldId id="257" r:id="rId8"/>
-    <p:sldId id="258" r:id="rId9"/>
-    <p:sldId id="259" r:id="rId10"/>
-    <p:sldId id="260" r:id="rId11"/>
-    <p:sldId id="261" r:id="rId12"/>
-    <p:sldId id="262" r:id="rId13"/>
+    <p:sldId id="256" r:id="rId2"/>
+    <p:sldId id="257" r:id="rId3"/>
+    <p:sldId id="258" r:id="rId4"/>
+    <p:sldId id="259" r:id="rId5"/>
+    <p:sldId id="260" r:id="rId6"/>
+    <p:sldId id="261" r:id="rId7"/>
+    <p:sldId id="262" r:id="rId8"/>
   </p:sldIdLst>
-  <p:sldSz cx="12191695" cy="6858000" type="screen4x3"/>
+  <p:sldSz cx="12192000" cy="6858000"/>
   <p:notesSz cx="6858000" cy="9144000"/>
   <p:defaultTextStyle>
     <a:defPPr>
@@ -110,6 +110,22 @@
       </a:defRPr>
     </a:lvl9pPr>
   </p:defaultTextStyle>
+  <p:extLst>
+    <p:ext uri="{EFAFB233-063F-42B5-8137-9DF3F51BA10A}">
+      <p15:sldGuideLst xmlns:p15="http://schemas.microsoft.com/office/powerpoint/2012/main">
+        <p15:guide id="1" orient="horz" pos="2160">
+          <p15:clr>
+            <a:srgbClr val="A4A3A4"/>
+          </p15:clr>
+        </p15:guide>
+        <p15:guide id="2" pos="2880">
+          <p15:clr>
+            <a:srgbClr val="A4A3A4"/>
+          </p15:clr>
+        </p15:guide>
+      </p15:sldGuideLst>
+    </p:ext>
+  </p:extLst>
 </p:presentation>
 </file>
 
@@ -151,10 +167,9 @@
           <a:lstStyle/>
           <a:p>
             <a:r>
-              <a:rPr lang="en-US" smtClean="0"/>
+              <a:rPr lang="en-US"/>
               <a:t>Click to edit Master title style</a:t>
             </a:r>
-            <a:endParaRPr lang="en-US"/>
           </a:p>
         </p:txBody>
       </p:sp>
@@ -270,10 +285,9 @@
           </a:lstStyle>
           <a:p>
             <a:r>
-              <a:rPr lang="en-US" smtClean="0"/>
+              <a:rPr lang="en-US"/>
               <a:t>Click to edit Master subtitle style</a:t>
             </a:r>
-            <a:endParaRPr lang="en-US"/>
           </a:p>
         </p:txBody>
       </p:sp>
@@ -294,7 +308,7 @@
           <a:p>
             <a:fld id="{5BCAD085-E8A6-8845-BD4E-CB4CCA059FC4}" type="datetimeFigureOut">
               <a:rPr lang="en-US" smtClean="0"/>
-              <a:t>1/27/13</a:t>
+              <a:t>10/19/2026</a:t>
             </a:fld>
             <a:endParaRPr lang="en-US"/>
           </a:p>
@@ -388,10 +402,9 @@
           <a:lstStyle/>
           <a:p>
             <a:r>
-              <a:rPr lang="en-US" smtClean="0"/>
+              <a:rPr lang="en-US"/>
               <a:t>Click to edit Master title style</a:t>
             </a:r>
-            <a:endParaRPr lang="en-US"/>
           </a:p>
         </p:txBody>
       </p:sp>
@@ -412,38 +425,37 @@
           <a:p>
             <a:pPr lvl="0"/>
             <a:r>
-              <a:rPr lang="en-US" smtClean="0"/>
+              <a:rPr lang="en-US"/>
               <a:t>Click to edit Master text styles</a:t>
             </a:r>
           </a:p>
           <a:p>
             <a:pPr lvl="1"/>
             <a:r>
-              <a:rPr lang="en-US" smtClean="0"/>
+              <a:rPr lang="en-US"/>
               <a:t>Second level</a:t>
             </a:r>
           </a:p>
           <a:p>
             <a:pPr lvl="2"/>
             <a:r>
-              <a:rPr lang="en-US" smtClean="0"/>
+              <a:rPr lang="en-US"/>
               <a:t>Third level</a:t>
             </a:r>
           </a:p>
           <a:p>
             <a:pPr lvl="3"/>
             <a:r>
-              <a:rPr lang="en-US" smtClean="0"/>
+              <a:rPr lang="en-US"/>
               <a:t>Fourth level</a:t>
             </a:r>
           </a:p>
           <a:p>
             <a:pPr lvl="4"/>
             <a:r>
-              <a:rPr lang="en-US" smtClean="0"/>
+              <a:rPr lang="en-US"/>
               <a:t>Fifth level</a:t>
             </a:r>
-            <a:endParaRPr lang="en-US"/>
           </a:p>
         </p:txBody>
       </p:sp>
@@ -464,7 +476,7 @@
           <a:p>
             <a:fld id="{5BCAD085-E8A6-8845-BD4E-CB4CCA059FC4}" type="datetimeFigureOut">
               <a:rPr lang="en-US" smtClean="0"/>
-              <a:t>1/27/13</a:t>
+              <a:t>10/19/2026</a:t>
             </a:fld>
             <a:endParaRPr lang="en-US"/>
           </a:p>
@@ -563,10 +575,9 @@
           <a:lstStyle/>
           <a:p>
             <a:r>
-              <a:rPr lang="en-US" smtClean="0"/>
+              <a:rPr lang="en-US"/>
               <a:t>Click to edit Master title style</a:t>
             </a:r>
-            <a:endParaRPr lang="en-US"/>
           </a:p>
         </p:txBody>
       </p:sp>
@@ -592,38 +603,37 @@
           <a:p>
             <a:pPr lvl="0"/>
             <a:r>
-              <a:rPr lang="en-US" smtClean="0"/>
+              <a:rPr lang="en-US"/>
               <a:t>Click to edit Master text styles</a:t>
             </a:r>
           </a:p>
           <a:p>
             <a:pPr lvl="1"/>
             <a:r>
-              <a:rPr lang="en-US" smtClean="0"/>
+              <a:rPr lang="en-US"/>
               <a:t>Second level</a:t>
             </a:r>
           </a:p>
           <a:p>
             <a:pPr lvl="2"/>
             <a:r>
-              <a:rPr lang="en-US" smtClean="0"/>
+              <a:rPr lang="en-US"/>
               <a:t>Third level</a:t>
             </a:r>
           </a:p>
           <a:p>
             <a:pPr lvl="3"/>
             <a:r>
-              <a:rPr lang="en-US" smtClean="0"/>
+              <a:rPr lang="en-US"/>
               <a:t>Fourth level</a:t>
             </a:r>
           </a:p>
           <a:p>
             <a:pPr lvl="4"/>
             <a:r>
-              <a:rPr lang="en-US" smtClean="0"/>
+              <a:rPr lang="en-US"/>
               <a:t>Fifth level</a:t>
             </a:r>
-            <a:endParaRPr lang="en-US"/>
           </a:p>
         </p:txBody>
       </p:sp>
@@ -644,7 +654,7 @@
           <a:p>
             <a:fld id="{5BCAD085-E8A6-8845-BD4E-CB4CCA059FC4}" type="datetimeFigureOut">
               <a:rPr lang="en-US" smtClean="0"/>
-              <a:t>1/27/13</a:t>
+              <a:t>10/19/2026</a:t>
             </a:fld>
             <a:endParaRPr lang="en-US"/>
           </a:p>
@@ -738,10 +748,9 @@
           <a:lstStyle/>
           <a:p>
             <a:r>
-              <a:rPr lang="en-US" smtClean="0"/>
+              <a:rPr lang="en-US"/>
               <a:t>Click to edit Master title style</a:t>
             </a:r>
-            <a:endParaRPr lang="en-US"/>
           </a:p>
         </p:txBody>
       </p:sp>
@@ -762,38 +771,37 @@
           <a:p>
             <a:pPr lvl="0"/>
             <a:r>
-              <a:rPr lang="en-US" smtClean="0"/>
+              <a:rPr lang="en-US"/>
               <a:t>Click to edit Master text styles</a:t>
             </a:r>
           </a:p>
           <a:p>
             <a:pPr lvl="1"/>
             <a:r>
-              <a:rPr lang="en-US" smtClean="0"/>
+              <a:rPr lang="en-US"/>
               <a:t>Second level</a:t>
             </a:r>
           </a:p>
           <a:p>
             <a:pPr lvl="2"/>
             <a:r>
-              <a:rPr lang="en-US" smtClean="0"/>
+              <a:rPr lang="en-US"/>
               <a:t>Third level</a:t>
             </a:r>
           </a:p>
           <a:p>
             <a:pPr lvl="3"/>
             <a:r>
-              <a:rPr lang="en-US" smtClean="0"/>
+              <a:rPr lang="en-US"/>
               <a:t>Fourth level</a:t>
             </a:r>
           </a:p>
           <a:p>
             <a:pPr lvl="4"/>
             <a:r>
-              <a:rPr lang="en-US" smtClean="0"/>
+              <a:rPr lang="en-US"/>
               <a:t>Fifth level</a:t>
             </a:r>
-            <a:endParaRPr lang="en-US"/>
           </a:p>
         </p:txBody>
       </p:sp>
@@ -814,7 +822,7 @@
           <a:p>
             <a:fld id="{5BCAD085-E8A6-8845-BD4E-CB4CCA059FC4}" type="datetimeFigureOut">
               <a:rPr lang="en-US" smtClean="0"/>
-              <a:t>1/27/13</a:t>
+              <a:t>10/19/2026</a:t>
             </a:fld>
             <a:endParaRPr lang="en-US"/>
           </a:p>
@@ -917,10 +925,9 @@
           </a:lstStyle>
           <a:p>
             <a:r>
-              <a:rPr lang="en-US" smtClean="0"/>
+              <a:rPr lang="en-US"/>
               <a:t>Click to edit Master title style</a:t>
             </a:r>
-            <a:endParaRPr lang="en-US"/>
           </a:p>
         </p:txBody>
       </p:sp>
@@ -1037,7 +1044,7 @@
           <a:p>
             <a:pPr lvl="0"/>
             <a:r>
-              <a:rPr lang="en-US" smtClean="0"/>
+              <a:rPr lang="en-US"/>
               <a:t>Click to edit Master text styles</a:t>
             </a:r>
           </a:p>
@@ -1060,7 +1067,7 @@
           <a:p>
             <a:fld id="{5BCAD085-E8A6-8845-BD4E-CB4CCA059FC4}" type="datetimeFigureOut">
               <a:rPr lang="en-US" smtClean="0"/>
-              <a:t>1/27/13</a:t>
+              <a:t>10/19/2026</a:t>
             </a:fld>
             <a:endParaRPr lang="en-US"/>
           </a:p>
@@ -1154,10 +1161,9 @@
           <a:lstStyle/>
           <a:p>
             <a:r>
-              <a:rPr lang="en-US" smtClean="0"/>
+              <a:rPr lang="en-US"/>
               <a:t>Click to edit Master title style</a:t>
             </a:r>
-            <a:endParaRPr lang="en-US"/>
           </a:p>
         </p:txBody>
       </p:sp>
@@ -1211,38 +1217,37 @@
           <a:p>
             <a:pPr lvl="0"/>
             <a:r>
-              <a:rPr lang="en-US" smtClean="0"/>
+              <a:rPr lang="en-US"/>
               <a:t>Click to edit Master text styles</a:t>
             </a:r>
           </a:p>
           <a:p>
             <a:pPr lvl="1"/>
             <a:r>
-              <a:rPr lang="en-US" smtClean="0"/>
+              <a:rPr lang="en-US"/>
               <a:t>Second level</a:t>
             </a:r>
           </a:p>
           <a:p>
             <a:pPr lvl="2"/>
             <a:r>
-              <a:rPr lang="en-US" smtClean="0"/>
+              <a:rPr lang="en-US"/>
               <a:t>Third level</a:t>
             </a:r>
           </a:p>
           <a:p>
             <a:pPr lvl="3"/>
             <a:r>
-              <a:rPr lang="en-US" smtClean="0"/>
+              <a:rPr lang="en-US"/>
               <a:t>Fourth level</a:t>
             </a:r>
           </a:p>
           <a:p>
             <a:pPr lvl="4"/>
             <a:r>
-              <a:rPr lang="en-US" smtClean="0"/>
+              <a:rPr lang="en-US"/>
               <a:t>Fifth level</a:t>
             </a:r>
-            <a:endParaRPr lang="en-US"/>
           </a:p>
         </p:txBody>
       </p:sp>
@@ -1296,38 +1301,37 @@
           <a:p>
             <a:pPr lvl="0"/>
             <a:r>
-              <a:rPr lang="en-US" smtClean="0"/>
+              <a:rPr lang="en-US"/>
               <a:t>Click to edit Master text styles</a:t>
             </a:r>
           </a:p>
           <a:p>
             <a:pPr lvl="1"/>
             <a:r>
-              <a:rPr lang="en-US" smtClean="0"/>
+              <a:rPr lang="en-US"/>
               <a:t>Second level</a:t>
             </a:r>
           </a:p>
           <a:p>
             <a:pPr lvl="2"/>
             <a:r>
-              <a:rPr lang="en-US" smtClean="0"/>
+              <a:rPr lang="en-US"/>
               <a:t>Third level</a:t>
             </a:r>
           </a:p>
           <a:p>
             <a:pPr lvl="3"/>
             <a:r>
-              <a:rPr lang="en-US" smtClean="0"/>
+              <a:rPr lang="en-US"/>
               <a:t>Fourth level</a:t>
             </a:r>
           </a:p>
           <a:p>
             <a:pPr lvl="4"/>
             <a:r>
-              <a:rPr lang="en-US" smtClean="0"/>
+              <a:rPr lang="en-US"/>
               <a:t>Fifth level</a:t>
             </a:r>
-            <a:endParaRPr lang="en-US"/>
           </a:p>
         </p:txBody>
       </p:sp>
@@ -1348,7 +1352,7 @@
           <a:p>
             <a:fld id="{5BCAD085-E8A6-8845-BD4E-CB4CCA059FC4}" type="datetimeFigureOut">
               <a:rPr lang="en-US" smtClean="0"/>
-              <a:t>1/27/13</a:t>
+              <a:t>10/19/2026</a:t>
             </a:fld>
             <a:endParaRPr lang="en-US"/>
           </a:p>
@@ -1446,10 +1450,9 @@
           </a:lstStyle>
           <a:p>
             <a:r>
-              <a:rPr lang="en-US" smtClean="0"/>
+              <a:rPr lang="en-US"/>
               <a:t>Click to edit Master title style</a:t>
             </a:r>
-            <a:endParaRPr lang="en-US"/>
           </a:p>
         </p:txBody>
       </p:sp>
@@ -1512,7 +1515,7 @@
           <a:p>
             <a:pPr lvl="0"/>
             <a:r>
-              <a:rPr lang="en-US" smtClean="0"/>
+              <a:rPr lang="en-US"/>
               <a:t>Click to edit Master text styles</a:t>
             </a:r>
           </a:p>
@@ -1568,38 +1571,37 @@
           <a:p>
             <a:pPr lvl="0"/>
             <a:r>
-              <a:rPr lang="en-US" smtClean="0"/>
+              <a:rPr lang="en-US"/>
               <a:t>Click to edit Master text styles</a:t>
             </a:r>
           </a:p>
           <a:p>
             <a:pPr lvl="1"/>
             <a:r>
-              <a:rPr lang="en-US" smtClean="0"/>
+              <a:rPr lang="en-US"/>
               <a:t>Second level</a:t>
             </a:r>
           </a:p>
           <a:p>
             <a:pPr lvl="2"/>
             <a:r>
-              <a:rPr lang="en-US" smtClean="0"/>
+              <a:rPr lang="en-US"/>
               <a:t>Third level</a:t>
             </a:r>
           </a:p>
           <a:p>
             <a:pPr lvl="3"/>
             <a:r>
-              <a:rPr lang="en-US" smtClean="0"/>
+              <a:rPr lang="en-US"/>
               <a:t>Fourth level</a:t>
             </a:r>
           </a:p>
           <a:p>
             <a:pPr lvl="4"/>
             <a:r>
-              <a:rPr lang="en-US" smtClean="0"/>
+              <a:rPr lang="en-US"/>
               <a:t>Fifth level</a:t>
             </a:r>
-            <a:endParaRPr lang="en-US"/>
           </a:p>
         </p:txBody>
       </p:sp>
@@ -1662,7 +1664,7 @@
           <a:p>
             <a:pPr lvl="0"/>
             <a:r>
-              <a:rPr lang="en-US" smtClean="0"/>
+              <a:rPr lang="en-US"/>
               <a:t>Click to edit Master text styles</a:t>
             </a:r>
           </a:p>
@@ -1718,38 +1720,37 @@
           <a:p>
             <a:pPr lvl="0"/>
             <a:r>
-              <a:rPr lang="en-US" smtClean="0"/>
+              <a:rPr lang="en-US"/>
               <a:t>Click to edit Master text styles</a:t>
             </a:r>
           </a:p>
           <a:p>
             <a:pPr lvl="1"/>
             <a:r>
-              <a:rPr lang="en-US" smtClean="0"/>
+              <a:rPr lang="en-US"/>
               <a:t>Second level</a:t>
             </a:r>
           </a:p>
           <a:p>
             <a:pPr lvl="2"/>
             <a:r>
-              <a:rPr lang="en-US" smtClean="0"/>
+              <a:rPr lang="en-US"/>
               <a:t>Third level</a:t>
             </a:r>
           </a:p>
           <a:p>
             <a:pPr lvl="3"/>
             <a:r>
-              <a:rPr lang="en-US" smtClean="0"/>
+              <a:rPr lang="en-US"/>
               <a:t>Fourth level</a:t>
             </a:r>
           </a:p>
           <a:p>
             <a:pPr lvl="4"/>
             <a:r>
-              <a:rPr lang="en-US" smtClean="0"/>
+              <a:rPr lang="en-US"/>
               <a:t>Fifth level</a:t>
             </a:r>
-            <a:endParaRPr lang="en-US"/>
           </a:p>
         </p:txBody>
       </p:sp>
@@ -1770,7 +1771,7 @@
           <a:p>
             <a:fld id="{5BCAD085-E8A6-8845-BD4E-CB4CCA059FC4}" type="datetimeFigureOut">
               <a:rPr lang="en-US" smtClean="0"/>
-              <a:t>1/27/13</a:t>
+              <a:t>10/19/2026</a:t>
             </a:fld>
             <a:endParaRPr lang="en-US"/>
           </a:p>
@@ -1864,10 +1865,9 @@
           <a:lstStyle/>
           <a:p>
             <a:r>
-              <a:rPr lang="en-US" smtClean="0"/>
+              <a:rPr lang="en-US"/>
               <a:t>Click to edit Master title style</a:t>
             </a:r>
-            <a:endParaRPr lang="en-US"/>
           </a:p>
         </p:txBody>
       </p:sp>
@@ -1888,7 +1888,7 @@
           <a:p>
             <a:fld id="{5BCAD085-E8A6-8845-BD4E-CB4CCA059FC4}" type="datetimeFigureOut">
               <a:rPr lang="en-US" smtClean="0"/>
-              <a:t>1/27/13</a:t>
+              <a:t>10/19/2026</a:t>
             </a:fld>
             <a:endParaRPr lang="en-US"/>
           </a:p>
@@ -1983,7 +1983,7 @@
           <a:p>
             <a:fld id="{5BCAD085-E8A6-8845-BD4E-CB4CCA059FC4}" type="datetimeFigureOut">
               <a:rPr lang="en-US" smtClean="0"/>
-              <a:t>1/27/13</a:t>
+              <a:t>10/19/2026</a:t>
             </a:fld>
             <a:endParaRPr lang="en-US"/>
           </a:p>
@@ -2086,10 +2086,9 @@
           </a:lstStyle>
           <a:p>
             <a:r>
-              <a:rPr lang="en-US" smtClean="0"/>
+              <a:rPr lang="en-US"/>
               <a:t>Click to edit Master title style</a:t>
             </a:r>
-            <a:endParaRPr lang="en-US"/>
           </a:p>
         </p:txBody>
       </p:sp>
@@ -2143,38 +2142,37 @@
           <a:p>
             <a:pPr lvl="0"/>
             <a:r>
-              <a:rPr lang="en-US" smtClean="0"/>
+              <a:rPr lang="en-US"/>
               <a:t>Click to edit Master text styles</a:t>
             </a:r>
           </a:p>
           <a:p>
             <a:pPr lvl="1"/>
             <a:r>
-              <a:rPr lang="en-US" smtClean="0"/>
+              <a:rPr lang="en-US"/>
               <a:t>Second level</a:t>
             </a:r>
           </a:p>
           <a:p>
             <a:pPr lvl="2"/>
             <a:r>
-              <a:rPr lang="en-US" smtClean="0"/>
+              <a:rPr lang="en-US"/>
               <a:t>Third level</a:t>
             </a:r>
           </a:p>
           <a:p>
             <a:pPr lvl="3"/>
             <a:r>
-              <a:rPr lang="en-US" smtClean="0"/>
+              <a:rPr lang="en-US"/>
               <a:t>Fourth level</a:t>
             </a:r>
           </a:p>
           <a:p>
             <a:pPr lvl="4"/>
             <a:r>
-              <a:rPr lang="en-US" smtClean="0"/>
+              <a:rPr lang="en-US"/>
               <a:t>Fifth level</a:t>
             </a:r>
-            <a:endParaRPr lang="en-US"/>
           </a:p>
         </p:txBody>
       </p:sp>
@@ -2237,7 +2235,7 @@
           <a:p>
             <a:pPr lvl="0"/>
             <a:r>
-              <a:rPr lang="en-US" smtClean="0"/>
+              <a:rPr lang="en-US"/>
               <a:t>Click to edit Master text styles</a:t>
             </a:r>
           </a:p>
@@ -2260,7 +2258,7 @@
           <a:p>
             <a:fld id="{5BCAD085-E8A6-8845-BD4E-CB4CCA059FC4}" type="datetimeFigureOut">
               <a:rPr lang="en-US" smtClean="0"/>
-              <a:t>1/27/13</a:t>
+              <a:t>10/19/2026</a:t>
             </a:fld>
             <a:endParaRPr lang="en-US"/>
           </a:p>
@@ -2363,10 +2361,9 @@
           </a:lstStyle>
           <a:p>
             <a:r>
-              <a:rPr lang="en-US" smtClean="0"/>
+              <a:rPr lang="en-US"/>
               <a:t>Click to edit Master title style</a:t>
             </a:r>
-            <a:endParaRPr lang="en-US"/>
           </a:p>
         </p:txBody>
       </p:sp>
@@ -2490,7 +2487,7 @@
           <a:p>
             <a:pPr lvl="0"/>
             <a:r>
-              <a:rPr lang="en-US" smtClean="0"/>
+              <a:rPr lang="en-US"/>
               <a:t>Click to edit Master text styles</a:t>
             </a:r>
           </a:p>
@@ -2513,7 +2510,7 @@
           <a:p>
             <a:fld id="{5BCAD085-E8A6-8845-BD4E-CB4CCA059FC4}" type="datetimeFigureOut">
               <a:rPr lang="en-US" smtClean="0"/>
-              <a:t>1/27/13</a:t>
+              <a:t>10/19/2026</a:t>
             </a:fld>
             <a:endParaRPr lang="en-US"/>
           </a:p>
@@ -2622,10 +2619,9 @@
           <a:lstStyle/>
           <a:p>
             <a:r>
-              <a:rPr lang="en-US" smtClean="0"/>
+              <a:rPr lang="en-US"/>
               <a:t>Click to edit Master title style</a:t>
             </a:r>
-            <a:endParaRPr lang="en-US"/>
           </a:p>
         </p:txBody>
       </p:sp>
@@ -2656,38 +2652,37 @@
           <a:p>
             <a:pPr lvl="0"/>
             <a:r>
-              <a:rPr lang="en-US" smtClean="0"/>
+              <a:rPr lang="en-US"/>
               <a:t>Click to edit Master text styles</a:t>
             </a:r>
           </a:p>
           <a:p>
             <a:pPr lvl="1"/>
             <a:r>
-              <a:rPr lang="en-US" smtClean="0"/>
+              <a:rPr lang="en-US"/>
               <a:t>Second level</a:t>
             </a:r>
           </a:p>
           <a:p>
             <a:pPr lvl="2"/>
             <a:r>
-              <a:rPr lang="en-US" smtClean="0"/>
+              <a:rPr lang="en-US"/>
               <a:t>Third level</a:t>
             </a:r>
           </a:p>
           <a:p>
             <a:pPr lvl="3"/>
             <a:r>
-              <a:rPr lang="en-US" smtClean="0"/>
+              <a:rPr lang="en-US"/>
               <a:t>Fourth level</a:t>
             </a:r>
           </a:p>
           <a:p>
             <a:pPr lvl="4"/>
             <a:r>
-              <a:rPr lang="en-US" smtClean="0"/>
+              <a:rPr lang="en-US"/>
               <a:t>Fifth level</a:t>
             </a:r>
-            <a:endParaRPr lang="en-US"/>
           </a:p>
         </p:txBody>
       </p:sp>
@@ -2726,7 +2721,7 @@
           <a:p>
             <a:fld id="{5BCAD085-E8A6-8845-BD4E-CB4CCA059FC4}" type="datetimeFigureOut">
               <a:rPr lang="en-US" smtClean="0"/>
-              <a:t>1/27/13</a:t>
+              <a:t>10/19/2026</a:t>
             </a:fld>
             <a:endParaRPr lang="en-US"/>
           </a:p>
@@ -3085,7 +3080,7 @@
 </file>
 
 <file path=ppt/slides/slide1.xml><?xml version="1.0" encoding="utf-8"?>
-<p:sld xmlns:a="http://schemas.openxmlformats.org/drawingml/2006/main" xmlns:p="http://schemas.openxmlformats.org/presentationml/2006/main" xmlns:r="http://schemas.openxmlformats.org/officeDocument/2006/relationships">
+<p:sld xmlns:a="http://schemas.openxmlformats.org/drawingml/2006/main" xmlns:r="http://schemas.openxmlformats.org/officeDocument/2006/relationships" xmlns:p="http://schemas.openxmlformats.org/presentationml/2006/main">
   <p:cSld>
     <p:spTree>
       <p:nvGrpSpPr>
@@ -3093,7 +3088,14 @@
         <p:cNvGrpSpPr/>
         <p:nvPr/>
       </p:nvGrpSpPr>
-      <p:grpSpPr/>
+      <p:grpSpPr>
+        <a:xfrm>
+          <a:off x="0" y="0"/>
+          <a:ext cx="0" cy="0"/>
+          <a:chOff x="0" y="0"/>
+          <a:chExt cx="0" cy="0"/>
+        </a:xfrm>
+      </p:grpSpPr>
       <p:sp>
         <p:nvSpPr>
           <p:cNvPr id="2" name="Rectangle 1"/>
@@ -3135,6 +3137,7 @@
           <a:lstStyle/>
           <a:p>
             <a:pPr algn="ctr"/>
+            <a:endParaRPr/>
           </a:p>
         </p:txBody>
       </p:sp>
@@ -3209,7 +3212,7 @@
 </file>
 
 <file path=ppt/slides/slide2.xml><?xml version="1.0" encoding="utf-8"?>
-<p:sld xmlns:a="http://schemas.openxmlformats.org/drawingml/2006/main" xmlns:p="http://schemas.openxmlformats.org/presentationml/2006/main" xmlns:r="http://schemas.openxmlformats.org/officeDocument/2006/relationships">
+<p:sld xmlns:a="http://schemas.openxmlformats.org/drawingml/2006/main" xmlns:r="http://schemas.openxmlformats.org/officeDocument/2006/relationships" xmlns:p="http://schemas.openxmlformats.org/presentationml/2006/main">
   <p:cSld>
     <p:spTree>
       <p:nvGrpSpPr>
@@ -3217,7 +3220,14 @@
         <p:cNvGrpSpPr/>
         <p:nvPr/>
       </p:nvGrpSpPr>
-      <p:grpSpPr/>
+      <p:grpSpPr>
+        <a:xfrm>
+          <a:off x="0" y="0"/>
+          <a:ext cx="0" cy="0"/>
+          <a:chOff x="0" y="0"/>
+          <a:chExt cx="0" cy="0"/>
+        </a:xfrm>
+      </p:grpSpPr>
       <p:sp>
         <p:nvSpPr>
           <p:cNvPr id="2" name="TextBox 1"/>
@@ -3294,6 +3304,7 @@
           <a:lstStyle/>
           <a:p>
             <a:pPr algn="ctr"/>
+            <a:endParaRPr/>
           </a:p>
         </p:txBody>
       </p:sp>
@@ -3570,7 +3581,7 @@
 </file>
 
 <file path=ppt/slides/slide3.xml><?xml version="1.0" encoding="utf-8"?>
-<p:sld xmlns:a="http://schemas.openxmlformats.org/drawingml/2006/main" xmlns:p="http://schemas.openxmlformats.org/presentationml/2006/main" xmlns:r="http://schemas.openxmlformats.org/officeDocument/2006/relationships">
+<p:sld xmlns:a="http://schemas.openxmlformats.org/drawingml/2006/main" xmlns:r="http://schemas.openxmlformats.org/officeDocument/2006/relationships" xmlns:p="http://schemas.openxmlformats.org/presentationml/2006/main">
   <p:cSld>
     <p:spTree>
       <p:nvGrpSpPr>
@@ -3578,7 +3589,14 @@
         <p:cNvGrpSpPr/>
         <p:nvPr/>
       </p:nvGrpSpPr>
-      <p:grpSpPr/>
+      <p:grpSpPr>
+        <a:xfrm>
+          <a:off x="0" y="0"/>
+          <a:ext cx="0" cy="0"/>
+          <a:chOff x="0" y="0"/>
+          <a:chExt cx="0" cy="0"/>
+        </a:xfrm>
+      </p:grpSpPr>
       <p:sp>
         <p:nvSpPr>
           <p:cNvPr id="2" name="TextBox 1"/>
@@ -3655,6 +3673,7 @@
           <a:lstStyle/>
           <a:p>
             <a:pPr algn="ctr"/>
+            <a:endParaRPr/>
           </a:p>
         </p:txBody>
       </p:sp>
@@ -3691,7 +3710,7 @@
 </file>
 
 <file path=ppt/slides/slide4.xml><?xml version="1.0" encoding="utf-8"?>
-<p:sld xmlns:a="http://schemas.openxmlformats.org/drawingml/2006/main" xmlns:p="http://schemas.openxmlformats.org/presentationml/2006/main" xmlns:r="http://schemas.openxmlformats.org/officeDocument/2006/relationships">
+<p:sld xmlns:a="http://schemas.openxmlformats.org/drawingml/2006/main" xmlns:r="http://schemas.openxmlformats.org/officeDocument/2006/relationships" xmlns:p="http://schemas.openxmlformats.org/presentationml/2006/main">
   <p:cSld>
     <p:spTree>
       <p:nvGrpSpPr>
@@ -3699,7 +3718,14 @@
         <p:cNvGrpSpPr/>
         <p:nvPr/>
       </p:nvGrpSpPr>
-      <p:grpSpPr/>
+      <p:grpSpPr>
+        <a:xfrm>
+          <a:off x="0" y="0"/>
+          <a:ext cx="0" cy="0"/>
+          <a:chOff x="0" y="0"/>
+          <a:chExt cx="0" cy="0"/>
+        </a:xfrm>
+      </p:grpSpPr>
       <p:sp>
         <p:nvSpPr>
           <p:cNvPr id="2" name="TextBox 1"/>
@@ -3776,6 +3802,7 @@
           <a:lstStyle/>
           <a:p>
             <a:pPr algn="ctr"/>
+            <a:endParaRPr/>
           </a:p>
         </p:txBody>
       </p:sp>
@@ -3901,7 +3928,7 @@
 </file>
 
 <file path=ppt/slides/slide5.xml><?xml version="1.0" encoding="utf-8"?>
-<p:sld xmlns:a="http://schemas.openxmlformats.org/drawingml/2006/main" xmlns:p="http://schemas.openxmlformats.org/presentationml/2006/main" xmlns:r="http://schemas.openxmlformats.org/officeDocument/2006/relationships">
+<p:sld xmlns:a="http://schemas.openxmlformats.org/drawingml/2006/main" xmlns:r="http://schemas.openxmlformats.org/officeDocument/2006/relationships" xmlns:p="http://schemas.openxmlformats.org/presentationml/2006/main">
   <p:cSld>
     <p:spTree>
       <p:nvGrpSpPr>
@@ -3909,7 +3936,14 @@
         <p:cNvGrpSpPr/>
         <p:nvPr/>
       </p:nvGrpSpPr>
-      <p:grpSpPr/>
+      <p:grpSpPr>
+        <a:xfrm>
+          <a:off x="0" y="0"/>
+          <a:ext cx="0" cy="0"/>
+          <a:chOff x="0" y="0"/>
+          <a:chExt cx="0" cy="0"/>
+        </a:xfrm>
+      </p:grpSpPr>
       <p:sp>
         <p:nvSpPr>
           <p:cNvPr id="2" name="TextBox 1"/>
@@ -3986,6 +4020,7 @@
           <a:lstStyle/>
           <a:p>
             <a:pPr algn="ctr"/>
+            <a:endParaRPr/>
           </a:p>
         </p:txBody>
       </p:sp>
@@ -4144,7 +4179,7 @@
           </a:fontRef>
         </p:style>
         <p:txBody>
-          <a:bodyPr rtlCol="0" anchor="ctr" wrap="square" lIns="228600" rIns="228600" tIns="109728" bIns="109728"/>
+          <a:bodyPr wrap="square" lIns="228600" tIns="109728" rIns="228600" bIns="109728" rtlCol="0" anchor="ctr"/>
           <a:lstStyle/>
           <a:p>
             <a:pPr algn="ctr">
@@ -4187,7 +4222,7 @@
 </file>
 
 <file path=ppt/slides/slide6.xml><?xml version="1.0" encoding="utf-8"?>
-<p:sld xmlns:a="http://schemas.openxmlformats.org/drawingml/2006/main" xmlns:p="http://schemas.openxmlformats.org/presentationml/2006/main" xmlns:r="http://schemas.openxmlformats.org/officeDocument/2006/relationships">
+<p:sld xmlns:a="http://schemas.openxmlformats.org/drawingml/2006/main" xmlns:r="http://schemas.openxmlformats.org/officeDocument/2006/relationships" xmlns:p="http://schemas.openxmlformats.org/presentationml/2006/main">
   <p:cSld>
     <p:spTree>
       <p:nvGrpSpPr>
@@ -4195,7 +4230,14 @@
         <p:cNvGrpSpPr/>
         <p:nvPr/>
       </p:nvGrpSpPr>
-      <p:grpSpPr/>
+      <p:grpSpPr>
+        <a:xfrm>
+          <a:off x="0" y="0"/>
+          <a:ext cx="0" cy="0"/>
+          <a:chOff x="0" y="0"/>
+          <a:chExt cx="0" cy="0"/>
+        </a:xfrm>
+      </p:grpSpPr>
       <p:sp>
         <p:nvSpPr>
           <p:cNvPr id="2" name="TextBox 1"/>
@@ -4272,6 +4314,7 @@
           <a:lstStyle/>
           <a:p>
             <a:pPr algn="ctr"/>
+            <a:endParaRPr/>
           </a:p>
         </p:txBody>
       </p:sp>
@@ -4455,7 +4498,7 @@
           </a:fontRef>
         </p:style>
         <p:txBody>
-          <a:bodyPr rtlCol="0" anchor="ctr" wrap="square" lIns="228600" rIns="228600" tIns="109728" bIns="109728"/>
+          <a:bodyPr wrap="square" lIns="228600" tIns="109728" rIns="228600" bIns="109728" rtlCol="0" anchor="ctr"/>
           <a:lstStyle/>
           <a:p>
             <a:pPr algn="ctr">
@@ -4469,23 +4512,34 @@
               </a:defRPr>
             </a:pPr>
             <a:r>
-              <a:t>$13,793,557 real stressed loss</a:t>
-            </a:r>
-          </a:p>
-          <a:p>
-            <a:pPr>
+              <a:rPr lang="en-IN" sz="2400" b="1" dirty="0">
+                <a:solidFill>
+                  <a:srgbClr val="0B0B0B"/>
+                </a:solidFill>
+              </a:rPr>
+              <a:t>$13.79M stressed loss (−2.09%)</a:t>
+            </a:r>
+          </a:p>
+          <a:p>
+            <a:pPr algn="ctr">
               <a:spcAft>
                 <a:spcPts val="400"/>
               </a:spcAft>
-              <a:defRPr sz="1500" b="0">
+              <a:defRPr sz="2400" b="1">
                 <a:solidFill>
                   <a:srgbClr val="0B0B0B"/>
                 </a:solidFill>
               </a:defRPr>
             </a:pPr>
             <a:r>
-              <a:t>2.09% of portfolio value, from one real headline</a:t>
-            </a:r>
+              <a:rPr lang="en-IN" sz="1400" dirty="0">
+                <a:solidFill>
+                  <a:srgbClr val="0B0B0B"/>
+                </a:solidFill>
+              </a:rPr>
+              <a:t>Fed severely-adverse scenario on the synthetic portfolio, triggered by a real headline</a:t>
+            </a:r>
+            <a:endParaRPr sz="1400" dirty="0"/>
           </a:p>
         </p:txBody>
       </p:sp>
@@ -4498,7 +4552,7 @@
 </file>
 
 <file path=ppt/slides/slide7.xml><?xml version="1.0" encoding="utf-8"?>
-<p:sld xmlns:a="http://schemas.openxmlformats.org/drawingml/2006/main" xmlns:p="http://schemas.openxmlformats.org/presentationml/2006/main" xmlns:r="http://schemas.openxmlformats.org/officeDocument/2006/relationships">
+<p:sld xmlns:a="http://schemas.openxmlformats.org/drawingml/2006/main" xmlns:r="http://schemas.openxmlformats.org/officeDocument/2006/relationships" xmlns:p="http://schemas.openxmlformats.org/presentationml/2006/main">
   <p:cSld>
     <p:spTree>
       <p:nvGrpSpPr>
@@ -4506,7 +4560,14 @@
         <p:cNvGrpSpPr/>
         <p:nvPr/>
       </p:nvGrpSpPr>
-      <p:grpSpPr/>
+      <p:grpSpPr>
+        <a:xfrm>
+          <a:off x="0" y="0"/>
+          <a:ext cx="0" cy="0"/>
+          <a:chOff x="0" y="0"/>
+          <a:chExt cx="0" cy="0"/>
+        </a:xfrm>
+      </p:grpSpPr>
       <p:sp>
         <p:nvSpPr>
           <p:cNvPr id="2" name="TextBox 1"/>
@@ -4583,6 +4644,7 @@
           <a:lstStyle/>
           <a:p>
             <a:pPr algn="ctr"/>
+            <a:endParaRPr/>
           </a:p>
         </p:txBody>
       </p:sp>

--- a/docs/presentation.pptx
+++ b/docs/presentation.pptx
@@ -5,15 +5,15 @@
     <p:sldMasterId id="2147483648" r:id="rId1"/>
   </p:sldMasterIdLst>
   <p:sldIdLst>
-    <p:sldId id="256" r:id="rId2"/>
-    <p:sldId id="257" r:id="rId3"/>
-    <p:sldId id="258" r:id="rId4"/>
-    <p:sldId id="259" r:id="rId5"/>
-    <p:sldId id="260" r:id="rId6"/>
-    <p:sldId id="261" r:id="rId7"/>
-    <p:sldId id="262" r:id="rId8"/>
+    <p:sldId id="256" r:id="rId7"/>
+    <p:sldId id="257" r:id="rId8"/>
+    <p:sldId id="258" r:id="rId9"/>
+    <p:sldId id="259" r:id="rId10"/>
+    <p:sldId id="260" r:id="rId11"/>
+    <p:sldId id="261" r:id="rId12"/>
+    <p:sldId id="262" r:id="rId13"/>
   </p:sldIdLst>
-  <p:sldSz cx="12192000" cy="6858000"/>
+  <p:sldSz cx="12191695" cy="6858000" type="screen4x3"/>
   <p:notesSz cx="6858000" cy="9144000"/>
   <p:defaultTextStyle>
     <a:defPPr>
@@ -110,22 +110,6 @@
       </a:defRPr>
     </a:lvl9pPr>
   </p:defaultTextStyle>
-  <p:extLst>
-    <p:ext uri="{EFAFB233-063F-42B5-8137-9DF3F51BA10A}">
-      <p15:sldGuideLst xmlns:p15="http://schemas.microsoft.com/office/powerpoint/2012/main">
-        <p15:guide id="1" orient="horz" pos="2160">
-          <p15:clr>
-            <a:srgbClr val="A4A3A4"/>
-          </p15:clr>
-        </p15:guide>
-        <p15:guide id="2" pos="2880">
-          <p15:clr>
-            <a:srgbClr val="A4A3A4"/>
-          </p15:clr>
-        </p15:guide>
-      </p15:sldGuideLst>
-    </p:ext>
-  </p:extLst>
 </p:presentation>
 </file>
 
@@ -167,9 +151,10 @@
           <a:lstStyle/>
           <a:p>
             <a:r>
-              <a:rPr lang="en-US"/>
+              <a:rPr lang="en-US" smtClean="0"/>
               <a:t>Click to edit Master title style</a:t>
             </a:r>
+            <a:endParaRPr lang="en-US"/>
           </a:p>
         </p:txBody>
       </p:sp>
@@ -285,9 +270,10 @@
           </a:lstStyle>
           <a:p>
             <a:r>
-              <a:rPr lang="en-US"/>
+              <a:rPr lang="en-US" smtClean="0"/>
               <a:t>Click to edit Master subtitle style</a:t>
             </a:r>
+            <a:endParaRPr lang="en-US"/>
           </a:p>
         </p:txBody>
       </p:sp>
@@ -308,7 +294,7 @@
           <a:p>
             <a:fld id="{5BCAD085-E8A6-8845-BD4E-CB4CCA059FC4}" type="datetimeFigureOut">
               <a:rPr lang="en-US" smtClean="0"/>
-              <a:t>10/19/2026</a:t>
+              <a:t>1/27/13</a:t>
             </a:fld>
             <a:endParaRPr lang="en-US"/>
           </a:p>
@@ -402,9 +388,10 @@
           <a:lstStyle/>
           <a:p>
             <a:r>
-              <a:rPr lang="en-US"/>
+              <a:rPr lang="en-US" smtClean="0"/>
               <a:t>Click to edit Master title style</a:t>
             </a:r>
+            <a:endParaRPr lang="en-US"/>
           </a:p>
         </p:txBody>
       </p:sp>
@@ -425,37 +412,38 @@
           <a:p>
             <a:pPr lvl="0"/>
             <a:r>
-              <a:rPr lang="en-US"/>
+              <a:rPr lang="en-US" smtClean="0"/>
               <a:t>Click to edit Master text styles</a:t>
             </a:r>
           </a:p>
           <a:p>
             <a:pPr lvl="1"/>
             <a:r>
-              <a:rPr lang="en-US"/>
+              <a:rPr lang="en-US" smtClean="0"/>
               <a:t>Second level</a:t>
             </a:r>
           </a:p>
           <a:p>
             <a:pPr lvl="2"/>
             <a:r>
-              <a:rPr lang="en-US"/>
+              <a:rPr lang="en-US" smtClean="0"/>
               <a:t>Third level</a:t>
             </a:r>
           </a:p>
           <a:p>
             <a:pPr lvl="3"/>
             <a:r>
-              <a:rPr lang="en-US"/>
+              <a:rPr lang="en-US" smtClean="0"/>
               <a:t>Fourth level</a:t>
             </a:r>
           </a:p>
           <a:p>
             <a:pPr lvl="4"/>
             <a:r>
-              <a:rPr lang="en-US"/>
+              <a:rPr lang="en-US" smtClean="0"/>
               <a:t>Fifth level</a:t>
             </a:r>
+            <a:endParaRPr lang="en-US"/>
           </a:p>
         </p:txBody>
       </p:sp>
@@ -476,7 +464,7 @@
           <a:p>
             <a:fld id="{5BCAD085-E8A6-8845-BD4E-CB4CCA059FC4}" type="datetimeFigureOut">
               <a:rPr lang="en-US" smtClean="0"/>
-              <a:t>10/19/2026</a:t>
+              <a:t>1/27/13</a:t>
             </a:fld>
             <a:endParaRPr lang="en-US"/>
           </a:p>
@@ -575,9 +563,10 @@
           <a:lstStyle/>
           <a:p>
             <a:r>
-              <a:rPr lang="en-US"/>
+              <a:rPr lang="en-US" smtClean="0"/>
               <a:t>Click to edit Master title style</a:t>
             </a:r>
+            <a:endParaRPr lang="en-US"/>
           </a:p>
         </p:txBody>
       </p:sp>
@@ -603,37 +592,38 @@
           <a:p>
             <a:pPr lvl="0"/>
             <a:r>
-              <a:rPr lang="en-US"/>
+              <a:rPr lang="en-US" smtClean="0"/>
               <a:t>Click to edit Master text styles</a:t>
             </a:r>
           </a:p>
           <a:p>
             <a:pPr lvl="1"/>
             <a:r>
-              <a:rPr lang="en-US"/>
+              <a:rPr lang="en-US" smtClean="0"/>
               <a:t>Second level</a:t>
             </a:r>
           </a:p>
           <a:p>
             <a:pPr lvl="2"/>
             <a:r>
-              <a:rPr lang="en-US"/>
+              <a:rPr lang="en-US" smtClean="0"/>
               <a:t>Third level</a:t>
             </a:r>
           </a:p>
           <a:p>
             <a:pPr lvl="3"/>
             <a:r>
-              <a:rPr lang="en-US"/>
+              <a:rPr lang="en-US" smtClean="0"/>
               <a:t>Fourth level</a:t>
             </a:r>
           </a:p>
           <a:p>
             <a:pPr lvl="4"/>
             <a:r>
-              <a:rPr lang="en-US"/>
+              <a:rPr lang="en-US" smtClean="0"/>
               <a:t>Fifth level</a:t>
             </a:r>
+            <a:endParaRPr lang="en-US"/>
           </a:p>
         </p:txBody>
       </p:sp>
@@ -654,7 +644,7 @@
           <a:p>
             <a:fld id="{5BCAD085-E8A6-8845-BD4E-CB4CCA059FC4}" type="datetimeFigureOut">
               <a:rPr lang="en-US" smtClean="0"/>
-              <a:t>10/19/2026</a:t>
+              <a:t>1/27/13</a:t>
             </a:fld>
             <a:endParaRPr lang="en-US"/>
           </a:p>
@@ -748,9 +738,10 @@
           <a:lstStyle/>
           <a:p>
             <a:r>
-              <a:rPr lang="en-US"/>
+              <a:rPr lang="en-US" smtClean="0"/>
               <a:t>Click to edit Master title style</a:t>
             </a:r>
+            <a:endParaRPr lang="en-US"/>
           </a:p>
         </p:txBody>
       </p:sp>
@@ -771,37 +762,38 @@
           <a:p>
             <a:pPr lvl="0"/>
             <a:r>
-              <a:rPr lang="en-US"/>
+              <a:rPr lang="en-US" smtClean="0"/>
               <a:t>Click to edit Master text styles</a:t>
             </a:r>
           </a:p>
           <a:p>
             <a:pPr lvl="1"/>
             <a:r>
-              <a:rPr lang="en-US"/>
+              <a:rPr lang="en-US" smtClean="0"/>
               <a:t>Second level</a:t>
             </a:r>
           </a:p>
           <a:p>
             <a:pPr lvl="2"/>
             <a:r>
-              <a:rPr lang="en-US"/>
+              <a:rPr lang="en-US" smtClean="0"/>
               <a:t>Third level</a:t>
             </a:r>
           </a:p>
           <a:p>
             <a:pPr lvl="3"/>
             <a:r>
-              <a:rPr lang="en-US"/>
+              <a:rPr lang="en-US" smtClean="0"/>
               <a:t>Fourth level</a:t>
             </a:r>
           </a:p>
           <a:p>
             <a:pPr lvl="4"/>
             <a:r>
-              <a:rPr lang="en-US"/>
+              <a:rPr lang="en-US" smtClean="0"/>
               <a:t>Fifth level</a:t>
             </a:r>
+            <a:endParaRPr lang="en-US"/>
           </a:p>
         </p:txBody>
       </p:sp>
@@ -822,7 +814,7 @@
           <a:p>
             <a:fld id="{5BCAD085-E8A6-8845-BD4E-CB4CCA059FC4}" type="datetimeFigureOut">
               <a:rPr lang="en-US" smtClean="0"/>
-              <a:t>10/19/2026</a:t>
+              <a:t>1/27/13</a:t>
             </a:fld>
             <a:endParaRPr lang="en-US"/>
           </a:p>
@@ -925,9 +917,10 @@
           </a:lstStyle>
           <a:p>
             <a:r>
-              <a:rPr lang="en-US"/>
+              <a:rPr lang="en-US" smtClean="0"/>
               <a:t>Click to edit Master title style</a:t>
             </a:r>
+            <a:endParaRPr lang="en-US"/>
           </a:p>
         </p:txBody>
       </p:sp>
@@ -1044,7 +1037,7 @@
           <a:p>
             <a:pPr lvl="0"/>
             <a:r>
-              <a:rPr lang="en-US"/>
+              <a:rPr lang="en-US" smtClean="0"/>
               <a:t>Click to edit Master text styles</a:t>
             </a:r>
           </a:p>
@@ -1067,7 +1060,7 @@
           <a:p>
             <a:fld id="{5BCAD085-E8A6-8845-BD4E-CB4CCA059FC4}" type="datetimeFigureOut">
               <a:rPr lang="en-US" smtClean="0"/>
-              <a:t>10/19/2026</a:t>
+              <a:t>1/27/13</a:t>
             </a:fld>
             <a:endParaRPr lang="en-US"/>
           </a:p>
@@ -1161,9 +1154,10 @@
           <a:lstStyle/>
           <a:p>
             <a:r>
-              <a:rPr lang="en-US"/>
+              <a:rPr lang="en-US" smtClean="0"/>
               <a:t>Click to edit Master title style</a:t>
             </a:r>
+            <a:endParaRPr lang="en-US"/>
           </a:p>
         </p:txBody>
       </p:sp>
@@ -1217,37 +1211,38 @@
           <a:p>
             <a:pPr lvl="0"/>
             <a:r>
-              <a:rPr lang="en-US"/>
+              <a:rPr lang="en-US" smtClean="0"/>
               <a:t>Click to edit Master text styles</a:t>
             </a:r>
           </a:p>
           <a:p>
             <a:pPr lvl="1"/>
             <a:r>
-              <a:rPr lang="en-US"/>
+              <a:rPr lang="en-US" smtClean="0"/>
               <a:t>Second level</a:t>
             </a:r>
           </a:p>
           <a:p>
             <a:pPr lvl="2"/>
             <a:r>
-              <a:rPr lang="en-US"/>
+              <a:rPr lang="en-US" smtClean="0"/>
               <a:t>Third level</a:t>
             </a:r>
           </a:p>
           <a:p>
             <a:pPr lvl="3"/>
             <a:r>
-              <a:rPr lang="en-US"/>
+              <a:rPr lang="en-US" smtClean="0"/>
               <a:t>Fourth level</a:t>
             </a:r>
           </a:p>
           <a:p>
             <a:pPr lvl="4"/>
             <a:r>
-              <a:rPr lang="en-US"/>
+              <a:rPr lang="en-US" smtClean="0"/>
               <a:t>Fifth level</a:t>
             </a:r>
+            <a:endParaRPr lang="en-US"/>
           </a:p>
         </p:txBody>
       </p:sp>
@@ -1301,37 +1296,38 @@
           <a:p>
             <a:pPr lvl="0"/>
             <a:r>
-              <a:rPr lang="en-US"/>
+              <a:rPr lang="en-US" smtClean="0"/>
               <a:t>Click to edit Master text styles</a:t>
             </a:r>
           </a:p>
           <a:p>
             <a:pPr lvl="1"/>
             <a:r>
-              <a:rPr lang="en-US"/>
+              <a:rPr lang="en-US" smtClean="0"/>
               <a:t>Second level</a:t>
             </a:r>
           </a:p>
           <a:p>
             <a:pPr lvl="2"/>
             <a:r>
-              <a:rPr lang="en-US"/>
+              <a:rPr lang="en-US" smtClean="0"/>
               <a:t>Third level</a:t>
             </a:r>
           </a:p>
           <a:p>
             <a:pPr lvl="3"/>
             <a:r>
-              <a:rPr lang="en-US"/>
+              <a:rPr lang="en-US" smtClean="0"/>
               <a:t>Fourth level</a:t>
             </a:r>
           </a:p>
           <a:p>
             <a:pPr lvl="4"/>
             <a:r>
-              <a:rPr lang="en-US"/>
+              <a:rPr lang="en-US" smtClean="0"/>
               <a:t>Fifth level</a:t>
             </a:r>
+            <a:endParaRPr lang="en-US"/>
           </a:p>
         </p:txBody>
       </p:sp>
@@ -1352,7 +1348,7 @@
           <a:p>
             <a:fld id="{5BCAD085-E8A6-8845-BD4E-CB4CCA059FC4}" type="datetimeFigureOut">
               <a:rPr lang="en-US" smtClean="0"/>
-              <a:t>10/19/2026</a:t>
+              <a:t>1/27/13</a:t>
             </a:fld>
             <a:endParaRPr lang="en-US"/>
           </a:p>
@@ -1450,9 +1446,10 @@
           </a:lstStyle>
           <a:p>
             <a:r>
-              <a:rPr lang="en-US"/>
+              <a:rPr lang="en-US" smtClean="0"/>
               <a:t>Click to edit Master title style</a:t>
             </a:r>
+            <a:endParaRPr lang="en-US"/>
           </a:p>
         </p:txBody>
       </p:sp>
@@ -1515,7 +1512,7 @@
           <a:p>
             <a:pPr lvl="0"/>
             <a:r>
-              <a:rPr lang="en-US"/>
+              <a:rPr lang="en-US" smtClean="0"/>
               <a:t>Click to edit Master text styles</a:t>
             </a:r>
           </a:p>
@@ -1571,37 +1568,38 @@
           <a:p>
             <a:pPr lvl="0"/>
             <a:r>
-              <a:rPr lang="en-US"/>
+              <a:rPr lang="en-US" smtClean="0"/>
               <a:t>Click to edit Master text styles</a:t>
             </a:r>
           </a:p>
           <a:p>
             <a:pPr lvl="1"/>
             <a:r>
-              <a:rPr lang="en-US"/>
+              <a:rPr lang="en-US" smtClean="0"/>
               <a:t>Second level</a:t>
             </a:r>
           </a:p>
           <a:p>
             <a:pPr lvl="2"/>
             <a:r>
-              <a:rPr lang="en-US"/>
+              <a:rPr lang="en-US" smtClean="0"/>
               <a:t>Third level</a:t>
             </a:r>
           </a:p>
           <a:p>
             <a:pPr lvl="3"/>
             <a:r>
-              <a:rPr lang="en-US"/>
+              <a:rPr lang="en-US" smtClean="0"/>
               <a:t>Fourth level</a:t>
             </a:r>
           </a:p>
           <a:p>
             <a:pPr lvl="4"/>
             <a:r>
-              <a:rPr lang="en-US"/>
+              <a:rPr lang="en-US" smtClean="0"/>
               <a:t>Fifth level</a:t>
             </a:r>
+            <a:endParaRPr lang="en-US"/>
           </a:p>
         </p:txBody>
       </p:sp>
@@ -1664,7 +1662,7 @@
           <a:p>
             <a:pPr lvl="0"/>
             <a:r>
-              <a:rPr lang="en-US"/>
+              <a:rPr lang="en-US" smtClean="0"/>
               <a:t>Click to edit Master text styles</a:t>
             </a:r>
           </a:p>
@@ -1720,37 +1718,38 @@
           <a:p>
             <a:pPr lvl="0"/>
             <a:r>
-              <a:rPr lang="en-US"/>
+              <a:rPr lang="en-US" smtClean="0"/>
               <a:t>Click to edit Master text styles</a:t>
             </a:r>
           </a:p>
           <a:p>
             <a:pPr lvl="1"/>
             <a:r>
-              <a:rPr lang="en-US"/>
+              <a:rPr lang="en-US" smtClean="0"/>
               <a:t>Second level</a:t>
             </a:r>
           </a:p>
           <a:p>
             <a:pPr lvl="2"/>
             <a:r>
-              <a:rPr lang="en-US"/>
+              <a:rPr lang="en-US" smtClean="0"/>
               <a:t>Third level</a:t>
             </a:r>
           </a:p>
           <a:p>
             <a:pPr lvl="3"/>
             <a:r>
-              <a:rPr lang="en-US"/>
+              <a:rPr lang="en-US" smtClean="0"/>
               <a:t>Fourth level</a:t>
             </a:r>
           </a:p>
           <a:p>
             <a:pPr lvl="4"/>
             <a:r>
-              <a:rPr lang="en-US"/>
+              <a:rPr lang="en-US" smtClean="0"/>
               <a:t>Fifth level</a:t>
             </a:r>
+            <a:endParaRPr lang="en-US"/>
           </a:p>
         </p:txBody>
       </p:sp>
@@ -1771,7 +1770,7 @@
           <a:p>
             <a:fld id="{5BCAD085-E8A6-8845-BD4E-CB4CCA059FC4}" type="datetimeFigureOut">
               <a:rPr lang="en-US" smtClean="0"/>
-              <a:t>10/19/2026</a:t>
+              <a:t>1/27/13</a:t>
             </a:fld>
             <a:endParaRPr lang="en-US"/>
           </a:p>
@@ -1865,9 +1864,10 @@
           <a:lstStyle/>
           <a:p>
             <a:r>
-              <a:rPr lang="en-US"/>
+              <a:rPr lang="en-US" smtClean="0"/>
               <a:t>Click to edit Master title style</a:t>
             </a:r>
+            <a:endParaRPr lang="en-US"/>
           </a:p>
         </p:txBody>
       </p:sp>
@@ -1888,7 +1888,7 @@
           <a:p>
             <a:fld id="{5BCAD085-E8A6-8845-BD4E-CB4CCA059FC4}" type="datetimeFigureOut">
               <a:rPr lang="en-US" smtClean="0"/>
-              <a:t>10/19/2026</a:t>
+              <a:t>1/27/13</a:t>
             </a:fld>
             <a:endParaRPr lang="en-US"/>
           </a:p>
@@ -1983,7 +1983,7 @@
           <a:p>
             <a:fld id="{5BCAD085-E8A6-8845-BD4E-CB4CCA059FC4}" type="datetimeFigureOut">
               <a:rPr lang="en-US" smtClean="0"/>
-              <a:t>10/19/2026</a:t>
+              <a:t>1/27/13</a:t>
             </a:fld>
             <a:endParaRPr lang="en-US"/>
           </a:p>
@@ -2086,9 +2086,10 @@
           </a:lstStyle>
           <a:p>
             <a:r>
-              <a:rPr lang="en-US"/>
+              <a:rPr lang="en-US" smtClean="0"/>
               <a:t>Click to edit Master title style</a:t>
             </a:r>
+            <a:endParaRPr lang="en-US"/>
           </a:p>
         </p:txBody>
       </p:sp>
@@ -2142,37 +2143,38 @@
           <a:p>
             <a:pPr lvl="0"/>
             <a:r>
-              <a:rPr lang="en-US"/>
+              <a:rPr lang="en-US" smtClean="0"/>
               <a:t>Click to edit Master text styles</a:t>
             </a:r>
           </a:p>
           <a:p>
             <a:pPr lvl="1"/>
             <a:r>
-              <a:rPr lang="en-US"/>
+              <a:rPr lang="en-US" smtClean="0"/>
               <a:t>Second level</a:t>
             </a:r>
           </a:p>
           <a:p>
             <a:pPr lvl="2"/>
             <a:r>
-              <a:rPr lang="en-US"/>
+              <a:rPr lang="en-US" smtClean="0"/>
               <a:t>Third level</a:t>
             </a:r>
           </a:p>
           <a:p>
             <a:pPr lvl="3"/>
             <a:r>
-              <a:rPr lang="en-US"/>
+              <a:rPr lang="en-US" smtClean="0"/>
               <a:t>Fourth level</a:t>
             </a:r>
           </a:p>
           <a:p>
             <a:pPr lvl="4"/>
             <a:r>
-              <a:rPr lang="en-US"/>
+              <a:rPr lang="en-US" smtClean="0"/>
               <a:t>Fifth level</a:t>
             </a:r>
+            <a:endParaRPr lang="en-US"/>
           </a:p>
         </p:txBody>
       </p:sp>
@@ -2235,7 +2237,7 @@
           <a:p>
             <a:pPr lvl="0"/>
             <a:r>
-              <a:rPr lang="en-US"/>
+              <a:rPr lang="en-US" smtClean="0"/>
               <a:t>Click to edit Master text styles</a:t>
             </a:r>
           </a:p>
@@ -2258,7 +2260,7 @@
           <a:p>
             <a:fld id="{5BCAD085-E8A6-8845-BD4E-CB4CCA059FC4}" type="datetimeFigureOut">
               <a:rPr lang="en-US" smtClean="0"/>
-              <a:t>10/19/2026</a:t>
+              <a:t>1/27/13</a:t>
             </a:fld>
             <a:endParaRPr lang="en-US"/>
           </a:p>
@@ -2361,9 +2363,10 @@
           </a:lstStyle>
           <a:p>
             <a:r>
-              <a:rPr lang="en-US"/>
+              <a:rPr lang="en-US" smtClean="0"/>
               <a:t>Click to edit Master title style</a:t>
             </a:r>
+            <a:endParaRPr lang="en-US"/>
           </a:p>
         </p:txBody>
       </p:sp>
@@ -2487,7 +2490,7 @@
           <a:p>
             <a:pPr lvl="0"/>
             <a:r>
-              <a:rPr lang="en-US"/>
+              <a:rPr lang="en-US" smtClean="0"/>
               <a:t>Click to edit Master text styles</a:t>
             </a:r>
           </a:p>
@@ -2510,7 +2513,7 @@
           <a:p>
             <a:fld id="{5BCAD085-E8A6-8845-BD4E-CB4CCA059FC4}" type="datetimeFigureOut">
               <a:rPr lang="en-US" smtClean="0"/>
-              <a:t>10/19/2026</a:t>
+              <a:t>1/27/13</a:t>
             </a:fld>
             <a:endParaRPr lang="en-US"/>
           </a:p>
@@ -2619,9 +2622,10 @@
           <a:lstStyle/>
           <a:p>
             <a:r>
-              <a:rPr lang="en-US"/>
+              <a:rPr lang="en-US" smtClean="0"/>
               <a:t>Click to edit Master title style</a:t>
             </a:r>
+            <a:endParaRPr lang="en-US"/>
           </a:p>
         </p:txBody>
       </p:sp>
@@ -2652,37 +2656,38 @@
           <a:p>
             <a:pPr lvl="0"/>
             <a:r>
-              <a:rPr lang="en-US"/>
+              <a:rPr lang="en-US" smtClean="0"/>
               <a:t>Click to edit Master text styles</a:t>
             </a:r>
           </a:p>
           <a:p>
             <a:pPr lvl="1"/>
             <a:r>
-              <a:rPr lang="en-US"/>
+              <a:rPr lang="en-US" smtClean="0"/>
               <a:t>Second level</a:t>
             </a:r>
           </a:p>
           <a:p>
             <a:pPr lvl="2"/>
             <a:r>
-              <a:rPr lang="en-US"/>
+              <a:rPr lang="en-US" smtClean="0"/>
               <a:t>Third level</a:t>
             </a:r>
           </a:p>
           <a:p>
             <a:pPr lvl="3"/>
             <a:r>
-              <a:rPr lang="en-US"/>
+              <a:rPr lang="en-US" smtClean="0"/>
               <a:t>Fourth level</a:t>
             </a:r>
           </a:p>
           <a:p>
             <a:pPr lvl="4"/>
             <a:r>
-              <a:rPr lang="en-US"/>
+              <a:rPr lang="en-US" smtClean="0"/>
               <a:t>Fifth level</a:t>
             </a:r>
+            <a:endParaRPr lang="en-US"/>
           </a:p>
         </p:txBody>
       </p:sp>
@@ -2721,7 +2726,7 @@
           <a:p>
             <a:fld id="{5BCAD085-E8A6-8845-BD4E-CB4CCA059FC4}" type="datetimeFigureOut">
               <a:rPr lang="en-US" smtClean="0"/>
-              <a:t>10/19/2026</a:t>
+              <a:t>1/27/13</a:t>
             </a:fld>
             <a:endParaRPr lang="en-US"/>
           </a:p>
@@ -3080,7 +3085,7 @@
 </file>
 
 <file path=ppt/slides/slide1.xml><?xml version="1.0" encoding="utf-8"?>
-<p:sld xmlns:a="http://schemas.openxmlformats.org/drawingml/2006/main" xmlns:r="http://schemas.openxmlformats.org/officeDocument/2006/relationships" xmlns:p="http://schemas.openxmlformats.org/presentationml/2006/main">
+<p:sld xmlns:a="http://schemas.openxmlformats.org/drawingml/2006/main" xmlns:p="http://schemas.openxmlformats.org/presentationml/2006/main" xmlns:r="http://schemas.openxmlformats.org/officeDocument/2006/relationships">
   <p:cSld>
     <p:spTree>
       <p:nvGrpSpPr>
@@ -3088,14 +3093,7 @@
         <p:cNvGrpSpPr/>
         <p:nvPr/>
       </p:nvGrpSpPr>
-      <p:grpSpPr>
-        <a:xfrm>
-          <a:off x="0" y="0"/>
-          <a:ext cx="0" cy="0"/>
-          <a:chOff x="0" y="0"/>
-          <a:chExt cx="0" cy="0"/>
-        </a:xfrm>
-      </p:grpSpPr>
+      <p:grpSpPr/>
       <p:sp>
         <p:nvSpPr>
           <p:cNvPr id="2" name="Rectangle 1"/>
@@ -3137,7 +3135,6 @@
           <a:lstStyle/>
           <a:p>
             <a:pPr algn="ctr"/>
-            <a:endParaRPr/>
           </a:p>
         </p:txBody>
       </p:sp>
@@ -3212,7 +3209,7 @@
 </file>
 
 <file path=ppt/slides/slide2.xml><?xml version="1.0" encoding="utf-8"?>
-<p:sld xmlns:a="http://schemas.openxmlformats.org/drawingml/2006/main" xmlns:r="http://schemas.openxmlformats.org/officeDocument/2006/relationships" xmlns:p="http://schemas.openxmlformats.org/presentationml/2006/main">
+<p:sld xmlns:a="http://schemas.openxmlformats.org/drawingml/2006/main" xmlns:p="http://schemas.openxmlformats.org/presentationml/2006/main" xmlns:r="http://schemas.openxmlformats.org/officeDocument/2006/relationships">
   <p:cSld>
     <p:spTree>
       <p:nvGrpSpPr>
@@ -3220,14 +3217,7 @@
         <p:cNvGrpSpPr/>
         <p:nvPr/>
       </p:nvGrpSpPr>
-      <p:grpSpPr>
-        <a:xfrm>
-          <a:off x="0" y="0"/>
-          <a:ext cx="0" cy="0"/>
-          <a:chOff x="0" y="0"/>
-          <a:chExt cx="0" cy="0"/>
-        </a:xfrm>
-      </p:grpSpPr>
+      <p:grpSpPr/>
       <p:sp>
         <p:nvSpPr>
           <p:cNvPr id="2" name="TextBox 1"/>
@@ -3304,7 +3294,6 @@
           <a:lstStyle/>
           <a:p>
             <a:pPr algn="ctr"/>
-            <a:endParaRPr/>
           </a:p>
         </p:txBody>
       </p:sp>
@@ -3567,7 +3556,7 @@
               </a:defRPr>
             </a:pPr>
             <a:r>
-              <a:t>• Entity linking: naive name match scored 30% precision (18/61) → cashtag + context rules reached 91.7% (44/48), confirmed 94.5% (52/55) on a fresh sample.</a:t>
+              <a:t>• Entity linking: a naive name match collided with everyday phrases ("Target" in "price target") → fixed with cashtag matching + context rules.</a:t>
             </a:r>
           </a:p>
         </p:txBody>
@@ -3581,7 +3570,7 @@
 </file>
 
 <file path=ppt/slides/slide3.xml><?xml version="1.0" encoding="utf-8"?>
-<p:sld xmlns:a="http://schemas.openxmlformats.org/drawingml/2006/main" xmlns:r="http://schemas.openxmlformats.org/officeDocument/2006/relationships" xmlns:p="http://schemas.openxmlformats.org/presentationml/2006/main">
+<p:sld xmlns:a="http://schemas.openxmlformats.org/drawingml/2006/main" xmlns:p="http://schemas.openxmlformats.org/presentationml/2006/main" xmlns:r="http://schemas.openxmlformats.org/officeDocument/2006/relationships">
   <p:cSld>
     <p:spTree>
       <p:nvGrpSpPr>
@@ -3589,14 +3578,7 @@
         <p:cNvGrpSpPr/>
         <p:nvPr/>
       </p:nvGrpSpPr>
-      <p:grpSpPr>
-        <a:xfrm>
-          <a:off x="0" y="0"/>
-          <a:ext cx="0" cy="0"/>
-          <a:chOff x="0" y="0"/>
-          <a:chExt cx="0" cy="0"/>
-        </a:xfrm>
-      </p:grpSpPr>
+      <p:grpSpPr/>
       <p:sp>
         <p:nvSpPr>
           <p:cNvPr id="2" name="TextBox 1"/>
@@ -3673,7 +3655,6 @@
           <a:lstStyle/>
           <a:p>
             <a:pPr algn="ctr"/>
-            <a:endParaRPr/>
           </a:p>
         </p:txBody>
       </p:sp>
@@ -3710,7 +3691,7 @@
 </file>
 
 <file path=ppt/slides/slide4.xml><?xml version="1.0" encoding="utf-8"?>
-<p:sld xmlns:a="http://schemas.openxmlformats.org/drawingml/2006/main" xmlns:r="http://schemas.openxmlformats.org/officeDocument/2006/relationships" xmlns:p="http://schemas.openxmlformats.org/presentationml/2006/main">
+<p:sld xmlns:a="http://schemas.openxmlformats.org/drawingml/2006/main" xmlns:p="http://schemas.openxmlformats.org/presentationml/2006/main" xmlns:r="http://schemas.openxmlformats.org/officeDocument/2006/relationships">
   <p:cSld>
     <p:spTree>
       <p:nvGrpSpPr>
@@ -3718,14 +3699,7 @@
         <p:cNvGrpSpPr/>
         <p:nvPr/>
       </p:nvGrpSpPr>
-      <p:grpSpPr>
-        <a:xfrm>
-          <a:off x="0" y="0"/>
-          <a:ext cx="0" cy="0"/>
-          <a:chOff x="0" y="0"/>
-          <a:chExt cx="0" cy="0"/>
-        </a:xfrm>
-      </p:grpSpPr>
+      <p:grpSpPr/>
       <p:sp>
         <p:nvSpPr>
           <p:cNvPr id="2" name="TextBox 1"/>
@@ -3802,7 +3776,6 @@
           <a:lstStyle/>
           <a:p>
             <a:pPr algn="ctr"/>
-            <a:endParaRPr/>
           </a:p>
         </p:txBody>
       </p:sp>
@@ -3928,7 +3901,7 @@
 </file>
 
 <file path=ppt/slides/slide5.xml><?xml version="1.0" encoding="utf-8"?>
-<p:sld xmlns:a="http://schemas.openxmlformats.org/drawingml/2006/main" xmlns:r="http://schemas.openxmlformats.org/officeDocument/2006/relationships" xmlns:p="http://schemas.openxmlformats.org/presentationml/2006/main">
+<p:sld xmlns:a="http://schemas.openxmlformats.org/drawingml/2006/main" xmlns:p="http://schemas.openxmlformats.org/presentationml/2006/main" xmlns:r="http://schemas.openxmlformats.org/officeDocument/2006/relationships">
   <p:cSld>
     <p:spTree>
       <p:nvGrpSpPr>
@@ -3936,14 +3909,7 @@
         <p:cNvGrpSpPr/>
         <p:nvPr/>
       </p:nvGrpSpPr>
-      <p:grpSpPr>
-        <a:xfrm>
-          <a:off x="0" y="0"/>
-          <a:ext cx="0" cy="0"/>
-          <a:chOff x="0" y="0"/>
-          <a:chExt cx="0" cy="0"/>
-        </a:xfrm>
-      </p:grpSpPr>
+      <p:grpSpPr/>
       <p:sp>
         <p:nvSpPr>
           <p:cNvPr id="2" name="TextBox 1"/>
@@ -4020,7 +3986,6 @@
           <a:lstStyle/>
           <a:p>
             <a:pPr algn="ctr"/>
-            <a:endParaRPr/>
           </a:p>
         </p:txBody>
       </p:sp>
@@ -4179,7 +4144,7 @@
           </a:fontRef>
         </p:style>
         <p:txBody>
-          <a:bodyPr wrap="square" lIns="228600" tIns="109728" rIns="228600" bIns="109728" rtlCol="0" anchor="ctr"/>
+          <a:bodyPr rtlCol="0" anchor="ctr" wrap="square" lIns="228600" rIns="228600" tIns="109728" bIns="109728"/>
           <a:lstStyle/>
           <a:p>
             <a:pPr algn="ctr">
@@ -4222,7 +4187,7 @@
 </file>
 
 <file path=ppt/slides/slide6.xml><?xml version="1.0" encoding="utf-8"?>
-<p:sld xmlns:a="http://schemas.openxmlformats.org/drawingml/2006/main" xmlns:r="http://schemas.openxmlformats.org/officeDocument/2006/relationships" xmlns:p="http://schemas.openxmlformats.org/presentationml/2006/main">
+<p:sld xmlns:a="http://schemas.openxmlformats.org/drawingml/2006/main" xmlns:p="http://schemas.openxmlformats.org/presentationml/2006/main" xmlns:r="http://schemas.openxmlformats.org/officeDocument/2006/relationships">
   <p:cSld>
     <p:spTree>
       <p:nvGrpSpPr>
@@ -4230,14 +4195,7 @@
         <p:cNvGrpSpPr/>
         <p:nvPr/>
       </p:nvGrpSpPr>
-      <p:grpSpPr>
-        <a:xfrm>
-          <a:off x="0" y="0"/>
-          <a:ext cx="0" cy="0"/>
-          <a:chOff x="0" y="0"/>
-          <a:chExt cx="0" cy="0"/>
-        </a:xfrm>
-      </p:grpSpPr>
+      <p:grpSpPr/>
       <p:sp>
         <p:nvSpPr>
           <p:cNvPr id="2" name="TextBox 1"/>
@@ -4314,7 +4272,6 @@
           <a:lstStyle/>
           <a:p>
             <a:pPr algn="ctr"/>
-            <a:endParaRPr/>
           </a:p>
         </p:txBody>
       </p:sp>
@@ -4498,7 +4455,7 @@
           </a:fontRef>
         </p:style>
         <p:txBody>
-          <a:bodyPr wrap="square" lIns="228600" tIns="109728" rIns="228600" bIns="109728" rtlCol="0" anchor="ctr"/>
+          <a:bodyPr rtlCol="0" anchor="ctr" wrap="square" lIns="228600" rIns="228600" tIns="109728" bIns="109728"/>
           <a:lstStyle/>
           <a:p>
             <a:pPr algn="ctr">
@@ -4512,34 +4469,23 @@
               </a:defRPr>
             </a:pPr>
             <a:r>
-              <a:rPr lang="en-IN" sz="2400" b="1" dirty="0">
-                <a:solidFill>
-                  <a:srgbClr val="0B0B0B"/>
-                </a:solidFill>
-              </a:rPr>
-              <a:t>$13.79M stressed loss (−2.09%)</a:t>
-            </a:r>
-          </a:p>
-          <a:p>
-            <a:pPr algn="ctr">
+              <a:t>$13.79M stressed loss (-2.09%)</a:t>
+            </a:r>
+          </a:p>
+          <a:p>
+            <a:pPr>
               <a:spcAft>
                 <a:spcPts val="400"/>
               </a:spcAft>
-              <a:defRPr sz="2400" b="1">
+              <a:defRPr sz="1500" b="0">
                 <a:solidFill>
                   <a:srgbClr val="0B0B0B"/>
                 </a:solidFill>
               </a:defRPr>
             </a:pPr>
             <a:r>
-              <a:rPr lang="en-IN" sz="1400" dirty="0">
-                <a:solidFill>
-                  <a:srgbClr val="0B0B0B"/>
-                </a:solidFill>
-              </a:rPr>
               <a:t>Fed severely-adverse scenario on the synthetic portfolio, triggered by a real headline</a:t>
             </a:r>
-            <a:endParaRPr sz="1400" dirty="0"/>
           </a:p>
         </p:txBody>
       </p:sp>
@@ -4552,7 +4498,7 @@
 </file>
 
 <file path=ppt/slides/slide7.xml><?xml version="1.0" encoding="utf-8"?>
-<p:sld xmlns:a="http://schemas.openxmlformats.org/drawingml/2006/main" xmlns:r="http://schemas.openxmlformats.org/officeDocument/2006/relationships" xmlns:p="http://schemas.openxmlformats.org/presentationml/2006/main">
+<p:sld xmlns:a="http://schemas.openxmlformats.org/drawingml/2006/main" xmlns:p="http://schemas.openxmlformats.org/presentationml/2006/main" xmlns:r="http://schemas.openxmlformats.org/officeDocument/2006/relationships">
   <p:cSld>
     <p:spTree>
       <p:nvGrpSpPr>
@@ -4560,14 +4506,7 @@
         <p:cNvGrpSpPr/>
         <p:nvPr/>
       </p:nvGrpSpPr>
-      <p:grpSpPr>
-        <a:xfrm>
-          <a:off x="0" y="0"/>
-          <a:ext cx="0" cy="0"/>
-          <a:chOff x="0" y="0"/>
-          <a:chExt cx="0" cy="0"/>
-        </a:xfrm>
-      </p:grpSpPr>
+      <p:grpSpPr/>
       <p:sp>
         <p:nvSpPr>
           <p:cNvPr id="2" name="TextBox 1"/>
@@ -4644,7 +4583,6 @@
           <a:lstStyle/>
           <a:p>
             <a:pPr algn="ctr"/>
-            <a:endParaRPr/>
           </a:p>
         </p:txBody>
       </p:sp>
